--- a/交換/20260922/治工具設計課週報_吳仁中 20260922.pptx
+++ b/交換/20260922/治工具設計課週報_吳仁中 20260922.pptx
@@ -186,7 +186,7 @@
       </p14:sectionLst>
     </p:ext>
     <p:ext uri="{EFAFB233-063F-42B5-8137-9DF3F51BA10A}">
-      <p15:sldGuideLst xmlns:p15="http://schemas.microsoft.com/office/powerpoint/2012/main" xmlns="">
+      <p15:sldGuideLst xmlns:p15="http://schemas.microsoft.com/office/powerpoint/2012/main">
         <p15:guide id="1" orient="horz" pos="2160">
           <p15:clr>
             <a:srgbClr val="A4A3A4"/>
@@ -200,7 +200,7 @@
       </p15:sldGuideLst>
     </p:ext>
     <p:ext uri="{2D200454-40CA-4A62-9FC3-DE9A4176ACB9}">
-      <p15:notesGuideLst xmlns:p15="http://schemas.microsoft.com/office/powerpoint/2012/main" xmlns="">
+      <p15:notesGuideLst xmlns:p15="http://schemas.microsoft.com/office/powerpoint/2012/main">
         <p15:guide id="1" orient="horz" pos="3107">
           <p15:clr>
             <a:srgbClr val="A4A3A4"/>
@@ -2142,12 +2142,12 @@
           <a:graphicData uri="http://schemas.openxmlformats.org/presentationml/2006/ole">
             <mc:AlternateContent xmlns:mc="http://schemas.openxmlformats.org/markup-compatibility/2006">
               <mc:Choice xmlns:v="urn:schemas-microsoft-com:vml" Requires="v">
-                <p:oleObj spid="_x0000_s1150" name="Photo Editor 影像 " r:id="rId3" imgW="11050542" imgH="2095793" progId="MSPhotoEd.3">
+                <p:oleObj name="Photo Editor 影像 " r:id="rId2" imgW="11050542" imgH="2095793" progId="MSPhotoEd.3">
                   <p:embed/>
                 </p:oleObj>
               </mc:Choice>
               <mc:Fallback>
-                <p:oleObj name="Photo Editor 影像 " r:id="rId3" imgW="11050542" imgH="2095793" progId="MSPhotoEd.3">
+                <p:oleObj name="Photo Editor 影像 " r:id="rId2" imgW="11050542" imgH="2095793" progId="MSPhotoEd.3">
                   <p:embed/>
                   <p:pic>
                     <p:nvPicPr>
@@ -2158,7 +2158,7 @@
                       <p:nvPr/>
                     </p:nvPicPr>
                     <p:blipFill>
-                      <a:blip r:embed="rId4">
+                      <a:blip r:embed="rId3">
                         <a:extLst>
                           <a:ext uri="{28A0092B-C50C-407E-A947-70E740481C1C}">
                             <a14:useLocalDpi xmlns:a14="http://schemas.microsoft.com/office/drawing/2010/main" val="0"/>
@@ -5591,18 +5591,13 @@
               <a:t> 日期：</a:t>
             </a:r>
             <a:r>
-              <a:rPr lang="en-US" altLang="zh-TW" b="0" dirty="0" smtClean="0">
+              <a:rPr lang="en-US" altLang="zh-TW" b="0" dirty="0">
                 <a:latin typeface="Times New Roman" pitchFamily="18" charset="0"/>
                 <a:ea typeface="標楷體" pitchFamily="65" charset="-120"/>
                 <a:cs typeface="Times New Roman" pitchFamily="18" charset="0"/>
               </a:rPr>
               <a:t>2026/09/22</a:t>
             </a:r>
-            <a:endParaRPr lang="en-US" altLang="zh-TW" b="0" dirty="0">
-              <a:latin typeface="Times New Roman" pitchFamily="18" charset="0"/>
-              <a:ea typeface="標楷體" pitchFamily="65" charset="-120"/>
-              <a:cs typeface="Times New Roman" pitchFamily="18" charset="0"/>
-            </a:endParaRPr>
           </a:p>
         </p:txBody>
       </p:sp>
@@ -5616,13 +5611,6 @@
   <p:clrMapOvr>
     <a:masterClrMapping/>
   </p:clrMapOvr>
-  <p:timing>
-    <p:tnLst>
-      <p:par>
-        <p:cTn id="1" dur="indefinite" restart="never" nodeType="tmRoot"/>
-      </p:par>
-    </p:tnLst>
-  </p:timing>
 </p:sld>
 </file>
 
@@ -5648,7 +5636,7 @@
           <p:cNvPr id="5" name="文字方塊 4">
             <a:extLst>
               <a:ext uri="{FF2B5EF4-FFF2-40B4-BE49-F238E27FC236}">
-                <a16:creationId xmlns:a16="http://schemas.microsoft.com/office/drawing/2014/main" xmlns="" id="{2D4D2B73-B008-B5AD-CC0D-F1827BE7F03A}"/>
+                <a16:creationId xmlns:a16="http://schemas.microsoft.com/office/drawing/2014/main" id="{2D4D2B73-B008-B5AD-CC0D-F1827BE7F03A}"/>
               </a:ext>
             </a:extLst>
           </p:cNvPr>
@@ -5680,7 +5668,7 @@
               <a:t>※ </a:t>
             </a:r>
             <a:r>
-              <a:rPr lang="zh-TW" altLang="en-US" sz="2400" dirty="0" smtClean="0">
+              <a:rPr lang="zh-TW" altLang="en-US" sz="2400" dirty="0">
                 <a:latin typeface="Times New Roman" pitchFamily="18" charset="0"/>
                 <a:ea typeface="標楷體" pitchFamily="65" charset="-120"/>
                 <a:cs typeface="Times New Roman" pitchFamily="18" charset="0"/>
@@ -5688,7 +5676,7 @@
               <a:t>區北廠 </a:t>
             </a:r>
             <a:r>
-              <a:rPr lang="en-US" altLang="zh-TW" sz="2400" dirty="0" smtClean="0">
+              <a:rPr lang="en-US" altLang="zh-TW" sz="2400" dirty="0">
                 <a:latin typeface="Times New Roman" pitchFamily="18" charset="0"/>
                 <a:ea typeface="標楷體" pitchFamily="65" charset="-120"/>
                 <a:cs typeface="Times New Roman" pitchFamily="18" charset="0"/>
@@ -5696,7 +5684,7 @@
               <a:t>- </a:t>
             </a:r>
             <a:r>
-              <a:rPr lang="zh-TW" altLang="en-US" sz="2400" dirty="0" smtClean="0">
+              <a:rPr lang="zh-TW" altLang="en-US" sz="2400" dirty="0">
                 <a:latin typeface="Times New Roman" pitchFamily="18" charset="0"/>
                 <a:ea typeface="標楷體" pitchFamily="65" charset="-120"/>
                 <a:cs typeface="Times New Roman" pitchFamily="18" charset="0"/>
@@ -5716,7 +5704,7 @@
           <p:cNvPr id="6" name="Text Placeholder 3">
             <a:extLst>
               <a:ext uri="{FF2B5EF4-FFF2-40B4-BE49-F238E27FC236}">
-                <a16:creationId xmlns:a16="http://schemas.microsoft.com/office/drawing/2014/main" xmlns="" id="{6263174D-9A64-366A-6A59-F4F84DDA189A}"/>
+                <a16:creationId xmlns:a16="http://schemas.microsoft.com/office/drawing/2014/main" id="{6263174D-9A64-366A-6A59-F4F84DDA189A}"/>
               </a:ext>
             </a:extLst>
           </p:cNvPr>
@@ -5933,13 +5921,13 @@
               <a:buChar char="Ø"/>
             </a:pPr>
             <a:r>
-              <a:rPr lang="zh-TW" altLang="en-US" sz="2000" b="0" kern="0" dirty="0" smtClean="0">
+              <a:rPr lang="zh-TW" altLang="en-US" sz="2000" b="0" kern="0" dirty="0">
                 <a:latin typeface="Calibri" panose="020F0502020204030204" pitchFamily="34" charset="0"/>
                 <a:cs typeface="Segoe UI" panose="020B0502040204020203" pitchFamily="34" charset="0"/>
               </a:rPr>
               <a:t>解決步驟：</a:t>
             </a:r>
-            <a:endParaRPr lang="en-US" altLang="zh-TW" sz="2000" b="0" kern="0" dirty="0" smtClean="0">
+            <a:endParaRPr lang="en-US" altLang="zh-TW" sz="2000" b="0" kern="0" dirty="0">
               <a:latin typeface="Calibri" panose="020F0502020204030204" pitchFamily="34" charset="0"/>
               <a:cs typeface="Segoe UI" panose="020B0502040204020203" pitchFamily="34" charset="0"/>
             </a:endParaRPr>
@@ -5954,14 +5942,14 @@
               <a:buAutoNum type="arabicPeriod"/>
             </a:pPr>
             <a:r>
-              <a:rPr lang="zh-TW" altLang="en-US" sz="2000" b="0" kern="0" dirty="0" smtClean="0">
+              <a:rPr lang="zh-TW" altLang="en-US" sz="2000" b="0" kern="0" dirty="0">
                 <a:latin typeface="Calibri" panose="020F0502020204030204" pitchFamily="34" charset="0"/>
                 <a:ea typeface="+mn-ea"/>
                 <a:cs typeface="Segoe UI" panose="020B0502040204020203" pitchFamily="34" charset="0"/>
               </a:rPr>
               <a:t>將馬達接上驅動器，開啟電源。</a:t>
             </a:r>
-            <a:endParaRPr lang="en-US" altLang="zh-TW" sz="2000" b="0" kern="0" dirty="0" smtClean="0">
+            <a:endParaRPr lang="en-US" altLang="zh-TW" sz="2000" b="0" kern="0" dirty="0">
               <a:latin typeface="Calibri" panose="020F0502020204030204" pitchFamily="34" charset="0"/>
               <a:ea typeface="+mn-ea"/>
               <a:cs typeface="Segoe UI" panose="020B0502040204020203" pitchFamily="34" charset="0"/>
@@ -5977,15 +5965,54 @@
               <a:buAutoNum type="arabicPeriod"/>
             </a:pPr>
             <a:r>
-              <a:rPr lang="zh-TW" altLang="en-US" sz="2000" b="0" kern="0" dirty="0" smtClean="0">
+              <a:rPr lang="zh-TW" altLang="en-US" sz="2000" b="0" kern="0" dirty="0">
                 <a:latin typeface="Calibri" panose="020F0502020204030204" pitchFamily="34" charset="0"/>
                 <a:ea typeface="+mn-ea"/>
                 <a:cs typeface="Segoe UI" panose="020B0502040204020203" pitchFamily="34" charset="0"/>
               </a:rPr>
-              <a:t>執行 </a:t>
+              <a:t>讓驅動器和馬達內部的絕對式編碼器（</a:t>
             </a:r>
             <a:r>
-              <a:rPr lang="en-US" altLang="zh-TW" sz="2000" b="0" kern="0" dirty="0" smtClean="0">
+              <a:rPr lang="en-US" altLang="zh-TW" sz="2000" b="0" kern="0" dirty="0">
+                <a:latin typeface="Calibri" panose="020F0502020204030204" pitchFamily="34" charset="0"/>
+                <a:ea typeface="+mn-ea"/>
+                <a:cs typeface="Segoe UI" panose="020B0502040204020203" pitchFamily="34" charset="0"/>
+              </a:rPr>
+              <a:t>ABZO </a:t>
+            </a:r>
+            <a:r>
+              <a:rPr lang="zh-TW" altLang="en-US" sz="2000" b="0" kern="0" dirty="0">
+                <a:latin typeface="Calibri" panose="020F0502020204030204" pitchFamily="34" charset="0"/>
+                <a:ea typeface="+mn-ea"/>
+                <a:cs typeface="Segoe UI" panose="020B0502040204020203" pitchFamily="34" charset="0"/>
+              </a:rPr>
+              <a:t>編碼器）進行資訊同步與綁定。</a:t>
+            </a:r>
+            <a:endParaRPr lang="en-US" altLang="zh-TW" sz="2000" b="0" kern="0" dirty="0">
+              <a:latin typeface="Calibri" panose="020F0502020204030204" pitchFamily="34" charset="0"/>
+              <a:ea typeface="+mn-ea"/>
+              <a:cs typeface="Segoe UI" panose="020B0502040204020203" pitchFamily="34" charset="0"/>
+            </a:endParaRPr>
+          </a:p>
+          <a:p>
+            <a:pPr marL="1314450" lvl="2" indent="-457200">
+              <a:lnSpc>
+                <a:spcPts val="3000"/>
+              </a:lnSpc>
+              <a:buClrTx/>
+              <a:buFont typeface="Wingdings" panose="05000000000000000000" pitchFamily="2" charset="2"/>
+              <a:buChar char="Ø"/>
+            </a:pPr>
+            <a:r>
+              <a:rPr lang="zh-TW" altLang="en-US" sz="2000" b="0" kern="0" dirty="0">
+                <a:latin typeface="Calibri" panose="020F0502020204030204" pitchFamily="34" charset="0"/>
+                <a:ea typeface="+mn-ea"/>
+                <a:cs typeface="Segoe UI" panose="020B0502040204020203" pitchFamily="34" charset="0"/>
+              </a:rPr>
+              <a:t>進入 </a:t>
+            </a:r>
+            <a:r>
+              <a:rPr lang="en-US" altLang="zh-TW" sz="2000" b="0" kern="0" dirty="0">
                 <a:latin typeface="Calibri" panose="020F0502020204030204" pitchFamily="34" charset="0"/>
                 <a:ea typeface="+mn-ea"/>
                 <a:cs typeface="Segoe UI" panose="020B0502040204020203" pitchFamily="34" charset="0"/>
@@ -5993,7 +6020,7 @@
               <a:t>MEXE02 </a:t>
             </a:r>
             <a:r>
-              <a:rPr lang="zh-TW" altLang="en-US" sz="2000" b="0" kern="0" dirty="0" smtClean="0">
+              <a:rPr lang="zh-TW" altLang="en-US" sz="2000" b="0" kern="0" dirty="0">
                 <a:latin typeface="Calibri" panose="020F0502020204030204" pitchFamily="34" charset="0"/>
                 <a:ea typeface="+mn-ea"/>
                 <a:cs typeface="Segoe UI" panose="020B0502040204020203" pitchFamily="34" charset="0"/>
@@ -6001,7 +6028,7 @@
               <a:t>設定軟體，執行「將</a:t>
             </a:r>
             <a:r>
-              <a:rPr lang="en-US" altLang="zh-TW" sz="2000" b="0" kern="0" dirty="0" smtClean="0">
+              <a:rPr lang="en-US" altLang="zh-TW" sz="2000" b="0" kern="0" dirty="0">
                 <a:latin typeface="Calibri" panose="020F0502020204030204" pitchFamily="34" charset="0"/>
                 <a:ea typeface="+mn-ea"/>
                 <a:cs typeface="Segoe UI" panose="020B0502040204020203" pitchFamily="34" charset="0"/>
@@ -6009,7 +6036,7 @@
               <a:t>ABZO(</a:t>
             </a:r>
             <a:r>
-              <a:rPr lang="zh-TW" altLang="en-US" sz="2000" b="0" kern="0" dirty="0" smtClean="0">
+              <a:rPr lang="zh-TW" altLang="en-US" sz="2000" b="0" kern="0" dirty="0">
                 <a:latin typeface="Calibri" panose="020F0502020204030204" pitchFamily="34" charset="0"/>
                 <a:ea typeface="+mn-ea"/>
                 <a:cs typeface="Segoe UI" panose="020B0502040204020203" pitchFamily="34" charset="0"/>
@@ -6017,7 +6044,7 @@
               <a:t>固定值</a:t>
             </a:r>
             <a:r>
-              <a:rPr lang="en-US" altLang="zh-TW" sz="2000" b="0" kern="0" dirty="0" smtClean="0">
+              <a:rPr lang="en-US" altLang="zh-TW" sz="2000" b="0" kern="0" dirty="0">
                 <a:latin typeface="Calibri" panose="020F0502020204030204" pitchFamily="34" charset="0"/>
                 <a:ea typeface="+mn-ea"/>
                 <a:cs typeface="Segoe UI" panose="020B0502040204020203" pitchFamily="34" charset="0"/>
@@ -6025,14 +6052,14 @@
               <a:t>)</a:t>
             </a:r>
             <a:r>
-              <a:rPr lang="zh-TW" altLang="en-US" sz="2000" b="0" kern="0" dirty="0" smtClean="0">
+              <a:rPr lang="zh-TW" altLang="en-US" sz="2000" b="0" kern="0" dirty="0">
                 <a:latin typeface="Calibri" panose="020F0502020204030204" pitchFamily="34" charset="0"/>
                 <a:ea typeface="+mn-ea"/>
                 <a:cs typeface="Segoe UI" panose="020B0502040204020203" pitchFamily="34" charset="0"/>
               </a:rPr>
               <a:t>的信息全部複製到驅動器」。</a:t>
             </a:r>
-            <a:endParaRPr lang="en-US" altLang="zh-TW" sz="2000" b="0" kern="0" dirty="0" smtClean="0">
+            <a:endParaRPr lang="en-US" altLang="zh-TW" sz="2000" b="0" kern="0" dirty="0">
               <a:latin typeface="Calibri" panose="020F0502020204030204" pitchFamily="34" charset="0"/>
               <a:ea typeface="+mn-ea"/>
               <a:cs typeface="Segoe UI" panose="020B0502040204020203" pitchFamily="34" charset="0"/>
@@ -6048,30 +6075,14 @@
               <a:buAutoNum type="arabicPeriod"/>
             </a:pPr>
             <a:r>
-              <a:rPr lang="zh-TW" altLang="en-US" sz="2000" b="0" kern="0" dirty="0" smtClean="0">
-                <a:latin typeface="Calibri" panose="020F0502020204030204" pitchFamily="34" charset="0"/>
-                <a:ea typeface="+mn-ea"/>
-                <a:cs typeface="Segoe UI" panose="020B0502040204020203" pitchFamily="34" charset="0"/>
-              </a:rPr>
-              <a:t>進入示教畫面，並勾選「開</a:t>
-            </a:r>
-            <a:r>
               <a:rPr lang="zh-TW" altLang="en-US" sz="2000" b="0" kern="0" dirty="0">
                 <a:latin typeface="Calibri" panose="020F0502020204030204" pitchFamily="34" charset="0"/>
                 <a:ea typeface="+mn-ea"/>
                 <a:cs typeface="Segoe UI" panose="020B0502040204020203" pitchFamily="34" charset="0"/>
               </a:rPr>
-              <a:t>始</a:t>
+              <a:t>進入示教畫面，並勾選「開始示教」。</a:t>
             </a:r>
-            <a:r>
-              <a:rPr lang="zh-TW" altLang="en-US" sz="2000" b="0" kern="0" dirty="0" smtClean="0">
-                <a:latin typeface="Calibri" panose="020F0502020204030204" pitchFamily="34" charset="0"/>
-                <a:ea typeface="+mn-ea"/>
-                <a:cs typeface="Segoe UI" panose="020B0502040204020203" pitchFamily="34" charset="0"/>
-              </a:rPr>
-              <a:t>示教」。</a:t>
-            </a:r>
-            <a:endParaRPr lang="en-US" altLang="zh-TW" sz="2000" b="0" kern="0" dirty="0" smtClean="0">
+            <a:endParaRPr lang="en-US" altLang="zh-TW" sz="2000" b="0" kern="0" dirty="0">
               <a:latin typeface="Calibri" panose="020F0502020204030204" pitchFamily="34" charset="0"/>
               <a:ea typeface="+mn-ea"/>
               <a:cs typeface="Segoe UI" panose="020B0502040204020203" pitchFamily="34" charset="0"/>
@@ -6087,7 +6098,7 @@
               <a:buAutoNum type="arabicPeriod"/>
             </a:pPr>
             <a:r>
-              <a:rPr lang="zh-TW" altLang="en-US" sz="2000" b="0" kern="0" dirty="0" smtClean="0">
+              <a:rPr lang="zh-TW" altLang="en-US" sz="2000" b="0" kern="0" dirty="0">
                 <a:latin typeface="Calibri" panose="020F0502020204030204" pitchFamily="34" charset="0"/>
                 <a:ea typeface="+mn-ea"/>
                 <a:cs typeface="Segoe UI" panose="020B0502040204020203" pitchFamily="34" charset="0"/>
@@ -6095,7 +6106,7 @@
               <a:t>使用 </a:t>
             </a:r>
             <a:r>
-              <a:rPr lang="en-US" altLang="zh-TW" sz="2000" b="0" kern="0" dirty="0" smtClean="0">
+              <a:rPr lang="en-US" altLang="zh-TW" sz="2000" b="0" kern="0" dirty="0">
                 <a:latin typeface="Calibri" panose="020F0502020204030204" pitchFamily="34" charset="0"/>
                 <a:ea typeface="+mn-ea"/>
                 <a:cs typeface="Segoe UI" panose="020B0502040204020203" pitchFamily="34" charset="0"/>
@@ -6103,7 +6114,7 @@
               <a:t>JOG </a:t>
             </a:r>
             <a:r>
-              <a:rPr lang="zh-TW" altLang="en-US" sz="2000" b="0" kern="0" dirty="0" smtClean="0">
+              <a:rPr lang="zh-TW" altLang="en-US" sz="2000" b="0" kern="0" dirty="0">
                 <a:latin typeface="Calibri" panose="020F0502020204030204" pitchFamily="34" charset="0"/>
                 <a:ea typeface="+mn-ea"/>
                 <a:cs typeface="Segoe UI" panose="020B0502040204020203" pitchFamily="34" charset="0"/>
@@ -6202,13 +6213,6 @@
   <p:clrMapOvr>
     <a:masterClrMapping/>
   </p:clrMapOvr>
-  <p:timing>
-    <p:tnLst>
-      <p:par>
-        <p:cTn id="1" dur="indefinite" restart="never" nodeType="tmRoot"/>
-      </p:par>
-    </p:tnLst>
-  </p:timing>
 </p:sld>
 </file>
 
@@ -6556,63 +6560,63 @@
                 <a:gridCol w="409574">
                   <a:extLst>
                     <a:ext uri="{9D8B030D-6E8A-4147-A177-3AD203B41FA5}">
-                      <a16:colId xmlns:a16="http://schemas.microsoft.com/office/drawing/2014/main" xmlns="" val="20000"/>
+                      <a16:colId xmlns:a16="http://schemas.microsoft.com/office/drawing/2014/main" val="20000"/>
                     </a:ext>
                   </a:extLst>
                 </a:gridCol>
                 <a:gridCol w="990596">
                   <a:extLst>
                     <a:ext uri="{9D8B030D-6E8A-4147-A177-3AD203B41FA5}">
-                      <a16:colId xmlns:a16="http://schemas.microsoft.com/office/drawing/2014/main" xmlns="" val="20001"/>
+                      <a16:colId xmlns:a16="http://schemas.microsoft.com/office/drawing/2014/main" val="20001"/>
                     </a:ext>
                   </a:extLst>
                 </a:gridCol>
                 <a:gridCol w="533400">
                   <a:extLst>
                     <a:ext uri="{9D8B030D-6E8A-4147-A177-3AD203B41FA5}">
-                      <a16:colId xmlns:a16="http://schemas.microsoft.com/office/drawing/2014/main" xmlns="" val="20002"/>
+                      <a16:colId xmlns:a16="http://schemas.microsoft.com/office/drawing/2014/main" val="20002"/>
                     </a:ext>
                   </a:extLst>
                 </a:gridCol>
                 <a:gridCol w="990600">
                   <a:extLst>
                     <a:ext uri="{9D8B030D-6E8A-4147-A177-3AD203B41FA5}">
-                      <a16:colId xmlns:a16="http://schemas.microsoft.com/office/drawing/2014/main" xmlns="" val="20003"/>
+                      <a16:colId xmlns:a16="http://schemas.microsoft.com/office/drawing/2014/main" val="20003"/>
                     </a:ext>
                   </a:extLst>
                 </a:gridCol>
                 <a:gridCol w="990600">
                   <a:extLst>
                     <a:ext uri="{9D8B030D-6E8A-4147-A177-3AD203B41FA5}">
-                      <a16:colId xmlns:a16="http://schemas.microsoft.com/office/drawing/2014/main" xmlns="" val="20004"/>
+                      <a16:colId xmlns:a16="http://schemas.microsoft.com/office/drawing/2014/main" val="20004"/>
                     </a:ext>
                   </a:extLst>
                 </a:gridCol>
                 <a:gridCol w="1447800">
                   <a:extLst>
                     <a:ext uri="{9D8B030D-6E8A-4147-A177-3AD203B41FA5}">
-                      <a16:colId xmlns:a16="http://schemas.microsoft.com/office/drawing/2014/main" xmlns="" val="20005"/>
+                      <a16:colId xmlns:a16="http://schemas.microsoft.com/office/drawing/2014/main" val="20005"/>
                     </a:ext>
                   </a:extLst>
                 </a:gridCol>
                 <a:gridCol w="1447800">
                   <a:extLst>
                     <a:ext uri="{9D8B030D-6E8A-4147-A177-3AD203B41FA5}">
-                      <a16:colId xmlns:a16="http://schemas.microsoft.com/office/drawing/2014/main" xmlns="" val="20006"/>
+                      <a16:colId xmlns:a16="http://schemas.microsoft.com/office/drawing/2014/main" val="20006"/>
                     </a:ext>
                   </a:extLst>
                 </a:gridCol>
                 <a:gridCol w="1219204">
                   <a:extLst>
                     <a:ext uri="{9D8B030D-6E8A-4147-A177-3AD203B41FA5}">
-                      <a16:colId xmlns:a16="http://schemas.microsoft.com/office/drawing/2014/main" xmlns="" val="20007"/>
+                      <a16:colId xmlns:a16="http://schemas.microsoft.com/office/drawing/2014/main" val="20007"/>
                     </a:ext>
                   </a:extLst>
                 </a:gridCol>
                 <a:gridCol w="914399">
                   <a:extLst>
                     <a:ext uri="{9D8B030D-6E8A-4147-A177-3AD203B41FA5}">
-                      <a16:colId xmlns:a16="http://schemas.microsoft.com/office/drawing/2014/main" xmlns="" val="20008"/>
+                      <a16:colId xmlns:a16="http://schemas.microsoft.com/office/drawing/2014/main" val="20008"/>
                     </a:ext>
                   </a:extLst>
                 </a:gridCol>
@@ -6846,7 +6850,7 @@
                     <a:p>
                       <a:pPr algn="ctr"/>
                       <a:r>
-                        <a:rPr lang="zh-TW" altLang="en-US" sz="1200" b="1" dirty="0" smtClean="0">
+                        <a:rPr lang="zh-TW" altLang="en-US" sz="1200" b="1" dirty="0">
                           <a:solidFill>
                             <a:schemeClr val="bg1"/>
                           </a:solidFill>
@@ -6856,14 +6860,6 @@
                         </a:rPr>
                         <a:t>開始時間</a:t>
                       </a:r>
-                      <a:endParaRPr lang="zh-TW" altLang="en-US" sz="1200" b="1" dirty="0">
-                        <a:solidFill>
-                          <a:schemeClr val="bg1"/>
-                        </a:solidFill>
-                        <a:latin typeface="Segoe UI" panose="020B0502040204020203" pitchFamily="34" charset="0"/>
-                        <a:ea typeface="+mn-ea"/>
-                        <a:cs typeface="Segoe UI" panose="020B0502040204020203" pitchFamily="34" charset="0"/>
-                      </a:endParaRPr>
                     </a:p>
                   </a:txBody>
                   <a:tcPr marT="45723" marB="45723" anchor="ctr">
@@ -6925,7 +6921,7 @@
                     <a:p>
                       <a:pPr algn="ctr"/>
                       <a:r>
-                        <a:rPr lang="zh-TW" altLang="en-US" sz="1200" b="1" dirty="0" smtClean="0">
+                        <a:rPr lang="zh-TW" altLang="en-US" sz="1200" b="1" dirty="0">
                           <a:solidFill>
                             <a:schemeClr val="bg1"/>
                           </a:solidFill>
@@ -6935,19 +6931,8 @@
                         </a:rPr>
                         <a:t>預計</a:t>
                       </a:r>
-                      <a:r>
-                        <a:rPr lang="en-US" altLang="zh-TW" sz="1200" b="1" dirty="0" smtClean="0">
-                          <a:solidFill>
-                            <a:schemeClr val="bg1"/>
-                          </a:solidFill>
-                          <a:latin typeface="Segoe UI" panose="020B0502040204020203" pitchFamily="34" charset="0"/>
-                          <a:ea typeface="+mn-ea"/>
-                          <a:cs typeface="Segoe UI" panose="020B0502040204020203" pitchFamily="34" charset="0"/>
-                        </a:rPr>
-                        <a:t/>
-                      </a:r>
                       <a:br>
-                        <a:rPr lang="en-US" altLang="zh-TW" sz="1200" b="1" dirty="0" smtClean="0">
+                        <a:rPr lang="en-US" altLang="zh-TW" sz="1200" b="1" dirty="0">
                           <a:solidFill>
                             <a:schemeClr val="bg1"/>
                           </a:solidFill>
@@ -6957,17 +6942,6 @@
                         </a:rPr>
                       </a:br>
                       <a:r>
-                        <a:rPr lang="zh-TW" altLang="en-US" sz="1200" b="1" dirty="0" smtClean="0">
-                          <a:solidFill>
-                            <a:schemeClr val="bg1"/>
-                          </a:solidFill>
-                          <a:latin typeface="Segoe UI" panose="020B0502040204020203" pitchFamily="34" charset="0"/>
-                          <a:ea typeface="+mn-ea"/>
-                          <a:cs typeface="Segoe UI" panose="020B0502040204020203" pitchFamily="34" charset="0"/>
-                        </a:rPr>
-                        <a:t>完成</a:t>
-                      </a:r>
-                      <a:r>
                         <a:rPr lang="zh-TW" altLang="en-US" sz="1200" b="1" dirty="0">
                           <a:solidFill>
                             <a:schemeClr val="bg1"/>
@@ -6976,7 +6950,7 @@
                           <a:ea typeface="+mn-ea"/>
                           <a:cs typeface="Segoe UI" panose="020B0502040204020203" pitchFamily="34" charset="0"/>
                         </a:rPr>
-                        <a:t>時間</a:t>
+                        <a:t>完成時間</a:t>
                       </a:r>
                     </a:p>
                   </a:txBody>
@@ -7318,7 +7292,7 @@
                 </a:tc>
                 <a:extLst>
                   <a:ext uri="{0D108BD9-81ED-4DB2-BD59-A6C34878D82A}">
-                    <a16:rowId xmlns:a16="http://schemas.microsoft.com/office/drawing/2014/main" xmlns="" val="10000"/>
+                    <a16:rowId xmlns:a16="http://schemas.microsoft.com/office/drawing/2014/main" val="10000"/>
                   </a:ext>
                 </a:extLst>
               </a:tr>
@@ -7750,7 +7724,7 @@
                         <a:defRPr/>
                       </a:pPr>
                       <a:r>
-                        <a:rPr lang="en-US" altLang="zh-TW" sz="1200" b="0" strike="sngStrike" baseline="0" dirty="0" smtClean="0">
+                        <a:rPr lang="en-US" altLang="zh-TW" sz="1200" b="0" strike="sngStrike" baseline="0" dirty="0">
                           <a:solidFill>
                             <a:schemeClr val="tx1"/>
                           </a:solidFill>
@@ -7790,7 +7764,7 @@
                         <a:defRPr/>
                       </a:pPr>
                       <a:r>
-                        <a:rPr lang="en-US" altLang="zh-TW" sz="1200" b="0" strike="noStrike" baseline="0" dirty="0" smtClean="0">
+                        <a:rPr lang="en-US" altLang="zh-TW" sz="1200" b="0" strike="noStrike" baseline="0" dirty="0">
                           <a:solidFill>
                             <a:schemeClr val="tx1"/>
                           </a:solidFill>
@@ -7968,7 +7942,7 @@
                         <a:defRPr/>
                       </a:pPr>
                       <a:r>
-                        <a:rPr lang="zh-TW" altLang="en-US" sz="1200" dirty="0" smtClean="0">
+                        <a:rPr lang="zh-TW" altLang="en-US" sz="1200" dirty="0">
                           <a:latin typeface="Segoe UI" panose="020B0502040204020203" pitchFamily="34" charset="0"/>
                           <a:ea typeface="+mn-ea"/>
                           <a:cs typeface="Segoe UI" panose="020B0502040204020203" pitchFamily="34" charset="0"/>
@@ -8354,7 +8328,7 @@
                 </a:tc>
                 <a:extLst>
                   <a:ext uri="{0D108BD9-81ED-4DB2-BD59-A6C34878D82A}">
-                    <a16:rowId xmlns:a16="http://schemas.microsoft.com/office/drawing/2014/main" xmlns="" val="10001"/>
+                    <a16:rowId xmlns:a16="http://schemas.microsoft.com/office/drawing/2014/main" val="10001"/>
                   </a:ext>
                 </a:extLst>
               </a:tr>
@@ -8721,7 +8695,7 @@
                         <a:defRPr/>
                       </a:pPr>
                       <a:r>
-                        <a:rPr lang="en-US" altLang="zh-TW" sz="1200" b="0" strike="sngStrike" baseline="0" dirty="0" smtClean="0">
+                        <a:rPr lang="en-US" altLang="zh-TW" sz="1200" b="0" strike="sngStrike" baseline="0" dirty="0">
                           <a:solidFill>
                             <a:schemeClr val="tx1"/>
                           </a:solidFill>
@@ -8752,7 +8726,7 @@
                         <a:defRPr/>
                       </a:pPr>
                       <a:r>
-                        <a:rPr lang="en-US" altLang="zh-TW" sz="1200" b="0" baseline="0" dirty="0" smtClean="0">
+                        <a:rPr lang="en-US" altLang="zh-TW" sz="1200" b="0" baseline="0" dirty="0">
                           <a:solidFill>
                             <a:schemeClr val="tx1"/>
                           </a:solidFill>
@@ -8763,15 +8737,6 @@
                         </a:rPr>
                         <a:t>2026/11/30</a:t>
                       </a:r>
-                      <a:endParaRPr lang="en-US" altLang="zh-TW" sz="1200" b="0" baseline="0" dirty="0">
-                        <a:solidFill>
-                          <a:schemeClr val="tx1"/>
-                        </a:solidFill>
-                        <a:latin typeface="Segoe UI" panose="020B0502040204020203" pitchFamily="34" charset="0"/>
-                        <a:ea typeface="+mn-ea"/>
-                        <a:cs typeface="Segoe UI" panose="020B0502040204020203" pitchFamily="34" charset="0"/>
-                        <a:sym typeface="Wingdings" pitchFamily="2" charset="2"/>
-                      </a:endParaRPr>
                     </a:p>
                   </a:txBody>
                   <a:tcPr marT="45723" marB="45723" anchor="ctr">
@@ -9028,21 +8993,8 @@
                           <a:ea typeface="+mn-ea"/>
                           <a:cs typeface="Segoe UI" panose="020B0502040204020203" pitchFamily="34" charset="0"/>
                         </a:rPr>
-                        <a:t>技術</a:t>
+                        <a:t>技術提升</a:t>
                       </a:r>
-                      <a:r>
-                        <a:rPr lang="zh-TW" altLang="en-US" sz="1200" dirty="0" smtClean="0">
-                          <a:latin typeface="Segoe UI" panose="020B0502040204020203" pitchFamily="34" charset="0"/>
-                          <a:ea typeface="+mn-ea"/>
-                          <a:cs typeface="Segoe UI" panose="020B0502040204020203" pitchFamily="34" charset="0"/>
-                        </a:rPr>
-                        <a:t>提升</a:t>
-                      </a:r>
-                      <a:endParaRPr lang="zh-TW" altLang="en-US" sz="1200" dirty="0">
-                        <a:latin typeface="Segoe UI" panose="020B0502040204020203" pitchFamily="34" charset="0"/>
-                        <a:ea typeface="+mn-ea"/>
-                        <a:cs typeface="Segoe UI" panose="020B0502040204020203" pitchFamily="34" charset="0"/>
-                      </a:endParaRPr>
                     </a:p>
                   </a:txBody>
                   <a:tcPr marT="45723" marB="45723" anchor="ctr">
@@ -9308,7 +9260,7 @@
                 </a:tc>
                 <a:extLst>
                   <a:ext uri="{0D108BD9-81ED-4DB2-BD59-A6C34878D82A}">
-                    <a16:rowId xmlns:a16="http://schemas.microsoft.com/office/drawing/2014/main" xmlns="" val="10002"/>
+                    <a16:rowId xmlns:a16="http://schemas.microsoft.com/office/drawing/2014/main" val="10002"/>
                   </a:ext>
                 </a:extLst>
               </a:tr>
@@ -9411,7 +9363,7 @@
                         <a:defRPr/>
                       </a:pPr>
                       <a:r>
-                        <a:rPr lang="zh-TW" altLang="en-US" sz="1200" kern="1200" dirty="0" smtClean="0">
+                        <a:rPr lang="zh-TW" altLang="en-US" sz="1200" kern="1200" dirty="0">
                           <a:solidFill>
                             <a:schemeClr val="tx1"/>
                           </a:solidFill>
@@ -9585,7 +9537,7 @@
                         <a:defRPr/>
                       </a:pPr>
                       <a:r>
-                        <a:rPr lang="en-US" altLang="zh-TW" sz="1200" b="0" baseline="0" dirty="0" smtClean="0">
+                        <a:rPr lang="en-US" altLang="zh-TW" sz="1200" b="0" baseline="0" dirty="0">
                           <a:solidFill>
                             <a:schemeClr val="tx1"/>
                           </a:solidFill>
@@ -9596,15 +9548,6 @@
                         </a:rPr>
                         <a:t>2026/08/25</a:t>
                       </a:r>
-                      <a:endParaRPr lang="en-US" altLang="zh-TW" sz="1200" b="0" baseline="0" dirty="0">
-                        <a:solidFill>
-                          <a:schemeClr val="tx1"/>
-                        </a:solidFill>
-                        <a:latin typeface="Segoe UI" panose="020B0502040204020203" pitchFamily="34" charset="0"/>
-                        <a:ea typeface="+mn-ea"/>
-                        <a:cs typeface="Segoe UI" panose="020B0502040204020203" pitchFamily="34" charset="0"/>
-                        <a:sym typeface="Wingdings" pitchFamily="2" charset="2"/>
-                      </a:endParaRPr>
                     </a:p>
                   </a:txBody>
                   <a:tcPr marT="45723" marB="45723" anchor="ctr">
@@ -9678,7 +9621,7 @@
                         <a:defRPr/>
                       </a:pPr>
                       <a:r>
-                        <a:rPr lang="en-US" altLang="zh-TW" sz="1200" b="0" strike="sngStrike" baseline="0" dirty="0" smtClean="0">
+                        <a:rPr lang="en-US" altLang="zh-TW" sz="1200" b="0" strike="sngStrike" baseline="0" dirty="0">
                           <a:solidFill>
                             <a:schemeClr val="tx1"/>
                           </a:solidFill>
@@ -9709,7 +9652,7 @@
                         <a:defRPr/>
                       </a:pPr>
                       <a:r>
-                        <a:rPr lang="en-US" altLang="zh-TW" sz="1200" b="0" strike="noStrike" baseline="0" dirty="0" smtClean="0">
+                        <a:rPr lang="en-US" altLang="zh-TW" sz="1200" b="0" strike="noStrike" baseline="0" dirty="0">
                           <a:solidFill>
                             <a:schemeClr val="tx1"/>
                           </a:solidFill>
@@ -9720,7 +9663,7 @@
                         </a:rPr>
                         <a:t>2026/09/18</a:t>
                       </a:r>
-                      <a:endParaRPr lang="en-US" altLang="zh-TW" sz="1200" b="0" strike="sngStrike" baseline="0" dirty="0" smtClean="0">
+                      <a:endParaRPr lang="en-US" altLang="zh-TW" sz="1200" b="0" strike="sngStrike" baseline="0" dirty="0">
                         <a:solidFill>
                           <a:schemeClr val="tx1"/>
                         </a:solidFill>
@@ -9802,14 +9745,14 @@
                         <a:defRPr/>
                       </a:pPr>
                       <a:r>
-                        <a:rPr lang="zh-TW" altLang="en-US" sz="1200" dirty="0" smtClean="0">
+                        <a:rPr lang="zh-TW" altLang="en-US" sz="1200" dirty="0">
                           <a:latin typeface="Segoe UI" panose="020B0502040204020203" pitchFamily="34" charset="0"/>
                           <a:ea typeface="+mn-ea"/>
                           <a:cs typeface="Segoe UI" panose="020B0502040204020203" pitchFamily="34" charset="0"/>
                         </a:rPr>
                         <a:t>校正功能。</a:t>
                       </a:r>
-                      <a:endParaRPr lang="en-US" altLang="zh-TW" sz="1200" dirty="0" smtClean="0">
+                      <a:endParaRPr lang="en-US" altLang="zh-TW" sz="1200" dirty="0">
                         <a:latin typeface="Segoe UI" panose="020B0502040204020203" pitchFamily="34" charset="0"/>
                         <a:ea typeface="+mn-ea"/>
                         <a:cs typeface="Segoe UI" panose="020B0502040204020203" pitchFamily="34" charset="0"/>
@@ -9834,14 +9777,14 @@
                         <a:defRPr/>
                       </a:pPr>
                       <a:r>
-                        <a:rPr lang="zh-TW" altLang="en-US" sz="1200" dirty="0" smtClean="0">
+                        <a:rPr lang="zh-TW" altLang="en-US" sz="1200" dirty="0">
                           <a:latin typeface="Segoe UI" panose="020B0502040204020203" pitchFamily="34" charset="0"/>
                           <a:ea typeface="+mn-ea"/>
                           <a:cs typeface="Segoe UI" panose="020B0502040204020203" pitchFamily="34" charset="0"/>
                         </a:rPr>
                         <a:t>量測歷史數據儲存。</a:t>
                       </a:r>
-                      <a:endParaRPr lang="en-US" altLang="zh-TW" sz="1200" dirty="0" smtClean="0">
+                      <a:endParaRPr lang="en-US" altLang="zh-TW" sz="1200" dirty="0">
                         <a:latin typeface="Segoe UI" panose="020B0502040204020203" pitchFamily="34" charset="0"/>
                         <a:ea typeface="+mn-ea"/>
                         <a:cs typeface="Segoe UI" panose="020B0502040204020203" pitchFamily="34" charset="0"/>
@@ -9866,14 +9809,14 @@
                         <a:defRPr/>
                       </a:pPr>
                       <a:r>
-                        <a:rPr lang="zh-TW" altLang="en-US" sz="1200" dirty="0" smtClean="0">
+                        <a:rPr lang="zh-TW" altLang="en-US" sz="1200" dirty="0">
                           <a:latin typeface="Segoe UI" panose="020B0502040204020203" pitchFamily="34" charset="0"/>
                           <a:ea typeface="+mn-ea"/>
                           <a:cs typeface="Segoe UI" panose="020B0502040204020203" pitchFamily="34" charset="0"/>
                         </a:rPr>
                         <a:t>機種參數存檔、讀取。</a:t>
                       </a:r>
-                      <a:endParaRPr lang="en-US" altLang="zh-TW" sz="1200" dirty="0" smtClean="0">
+                      <a:endParaRPr lang="en-US" altLang="zh-TW" sz="1200" dirty="0">
                         <a:latin typeface="Segoe UI" panose="020B0502040204020203" pitchFamily="34" charset="0"/>
                         <a:ea typeface="+mn-ea"/>
                         <a:cs typeface="Segoe UI" panose="020B0502040204020203" pitchFamily="34" charset="0"/>
@@ -9951,7 +9894,7 @@
                         <a:defRPr/>
                       </a:pPr>
                       <a:r>
-                        <a:rPr lang="zh-TW" altLang="en-US" sz="1200" dirty="0" smtClean="0">
+                        <a:rPr lang="zh-TW" altLang="en-US" sz="1200" dirty="0">
                           <a:latin typeface="Segoe UI" panose="020B0502040204020203" pitchFamily="34" charset="0"/>
                           <a:ea typeface="+mn-ea"/>
                           <a:cs typeface="Segoe UI" panose="020B0502040204020203" pitchFamily="34" charset="0"/>
@@ -10023,14 +9966,14 @@
                         <a:buChar char="•"/>
                       </a:pPr>
                       <a:r>
-                        <a:rPr lang="zh-TW" altLang="en-US" sz="1200" dirty="0" smtClean="0">
+                        <a:rPr lang="zh-TW" altLang="en-US" sz="1200" dirty="0">
                           <a:latin typeface="Segoe UI" panose="020B0502040204020203" pitchFamily="34" charset="0"/>
                           <a:ea typeface="+mn-ea"/>
                           <a:cs typeface="Segoe UI" panose="020B0502040204020203" pitchFamily="34" charset="0"/>
                         </a:rPr>
                         <a:t>即時判定量測是否合規。</a:t>
                       </a:r>
-                      <a:endParaRPr lang="en-US" altLang="zh-TW" sz="1200" dirty="0" smtClean="0">
+                      <a:endParaRPr lang="en-US" altLang="zh-TW" sz="1200" dirty="0">
                         <a:latin typeface="Segoe UI" panose="020B0502040204020203" pitchFamily="34" charset="0"/>
                         <a:ea typeface="+mn-ea"/>
                         <a:cs typeface="Segoe UI" panose="020B0502040204020203" pitchFamily="34" charset="0"/>
@@ -10042,7 +9985,7 @@
                         <a:buChar char="•"/>
                       </a:pPr>
                       <a:r>
-                        <a:rPr lang="zh-TW" altLang="en-US" sz="1200" dirty="0" smtClean="0">
+                        <a:rPr lang="zh-TW" altLang="en-US" sz="1200" dirty="0">
                           <a:latin typeface="Segoe UI" panose="020B0502040204020203" pitchFamily="34" charset="0"/>
                           <a:ea typeface="+mn-ea"/>
                           <a:cs typeface="Segoe UI" panose="020B0502040204020203" pitchFamily="34" charset="0"/>
@@ -10127,7 +10070,7 @@
                         <a:defRPr/>
                       </a:pPr>
                       <a:r>
-                        <a:rPr lang="zh-TW" altLang="en-US" sz="1200" b="0" kern="1200" dirty="0" smtClean="0">
+                        <a:rPr lang="zh-TW" altLang="en-US" sz="1200" b="0" kern="1200" dirty="0">
                           <a:solidFill>
                             <a:schemeClr val="tx1"/>
                           </a:solidFill>
@@ -10137,7 +10080,7 @@
                         </a:rPr>
                         <a:t>蔡孟堅</a:t>
                       </a:r>
-                      <a:endParaRPr lang="en-US" altLang="zh-TW" sz="1200" b="0" kern="1200" dirty="0" smtClean="0">
+                      <a:endParaRPr lang="en-US" altLang="zh-TW" sz="1200" b="0" kern="1200" dirty="0">
                         <a:solidFill>
                           <a:schemeClr val="tx1"/>
                         </a:solidFill>
@@ -10165,7 +10108,7 @@
                         <a:defRPr/>
                       </a:pPr>
                       <a:r>
-                        <a:rPr lang="zh-TW" altLang="en-US" sz="1200" b="0" kern="1200" dirty="0" smtClean="0">
+                        <a:rPr lang="zh-TW" altLang="en-US" sz="1200" b="0" kern="1200" dirty="0">
                           <a:solidFill>
                             <a:schemeClr val="tx1"/>
                           </a:solidFill>
@@ -10175,7 +10118,7 @@
                         </a:rPr>
                         <a:t>吳仁中</a:t>
                       </a:r>
-                      <a:endParaRPr lang="en-US" altLang="zh-TW" sz="1200" b="0" kern="1200" dirty="0" smtClean="0">
+                      <a:endParaRPr lang="en-US" altLang="zh-TW" sz="1200" b="0" kern="1200" dirty="0">
                         <a:solidFill>
                           <a:schemeClr val="tx1"/>
                         </a:solidFill>
@@ -10235,7 +10178,7 @@
                 </a:tc>
                 <a:extLst>
                   <a:ext uri="{0D108BD9-81ED-4DB2-BD59-A6C34878D82A}">
-                    <a16:rowId xmlns:a16="http://schemas.microsoft.com/office/drawing/2014/main" xmlns="" val="10003"/>
+                    <a16:rowId xmlns:a16="http://schemas.microsoft.com/office/drawing/2014/main" val="10003"/>
                   </a:ext>
                 </a:extLst>
               </a:tr>
@@ -10263,7 +10206,6 @@
             <a:headEnd type="none" w="med" len="med"/>
             <a:tailEnd type="none" w="med" len="med"/>
           </a:ln>
-          <a:extLst/>
         </p:spPr>
         <p:style>
           <a:lnRef idx="1">
@@ -10303,7 +10245,7 @@
               <a:buNone/>
               <a:tabLst/>
             </a:pPr>
-            <a:endParaRPr kumimoji="1" lang="zh-TW" altLang="en-US" sz="2800" b="1" i="0" u="none" strike="noStrike" cap="none" normalizeH="0" baseline="0" smtClean="0">
+            <a:endParaRPr kumimoji="1" lang="zh-TW" altLang="en-US" sz="2800" b="1" i="0" u="none" strike="noStrike" cap="none" normalizeH="0" baseline="0">
               <a:ln>
                 <a:noFill/>
               </a:ln>
@@ -10470,21 +10412,8 @@
                 <a:ea typeface="標楷體" pitchFamily="65" charset="-120"/>
                 <a:cs typeface="Times New Roman" pitchFamily="18" charset="0"/>
               </a:rPr>
-              <a:t>一、</a:t>
+              <a:t>一、專案列表</a:t>
             </a:r>
-            <a:r>
-              <a:rPr lang="zh-TW" altLang="en-US" sz="2000" dirty="0" smtClean="0">
-                <a:latin typeface="Times New Roman" pitchFamily="18" charset="0"/>
-                <a:ea typeface="標楷體" pitchFamily="65" charset="-120"/>
-                <a:cs typeface="Times New Roman" pitchFamily="18" charset="0"/>
-              </a:rPr>
-              <a:t>專案列表</a:t>
-            </a:r>
-            <a:endParaRPr lang="zh-TW" altLang="en-US" sz="2000" dirty="0">
-              <a:latin typeface="Times New Roman" pitchFamily="18" charset="0"/>
-              <a:ea typeface="標楷體" pitchFamily="65" charset="-120"/>
-              <a:cs typeface="Times New Roman" pitchFamily="18" charset="0"/>
-            </a:endParaRPr>
           </a:p>
         </p:txBody>
       </p:sp>
@@ -10498,13 +10427,6 @@
   <p:clrMapOvr>
     <a:masterClrMapping/>
   </p:clrMapOvr>
-  <p:timing>
-    <p:tnLst>
-      <p:par>
-        <p:cTn id="1" dur="indefinite" restart="never" nodeType="tmRoot"/>
-      </p:par>
-    </p:tnLst>
-  </p:timing>
 </p:sld>
 </file>
 
@@ -10833,7 +10755,7 @@
           <p:nvPr>
             <p:extLst>
               <p:ext uri="{D42A27DB-BD31-4B8C-83A1-F6EECF244321}">
-                <p14:modId xmlns:p14="http://schemas.microsoft.com/office/powerpoint/2010/main" val="3459166877"/>
+                <p14:modId xmlns:p14="http://schemas.microsoft.com/office/powerpoint/2010/main" val="3846333629"/>
               </p:ext>
             </p:extLst>
           </p:nvPr>
@@ -10852,63 +10774,63 @@
                 <a:gridCol w="409574">
                   <a:extLst>
                     <a:ext uri="{9D8B030D-6E8A-4147-A177-3AD203B41FA5}">
-                      <a16:colId xmlns:a16="http://schemas.microsoft.com/office/drawing/2014/main" xmlns="" val="20000"/>
+                      <a16:colId xmlns:a16="http://schemas.microsoft.com/office/drawing/2014/main" val="20000"/>
                     </a:ext>
                   </a:extLst>
                 </a:gridCol>
                 <a:gridCol w="990596">
                   <a:extLst>
                     <a:ext uri="{9D8B030D-6E8A-4147-A177-3AD203B41FA5}">
-                      <a16:colId xmlns:a16="http://schemas.microsoft.com/office/drawing/2014/main" xmlns="" val="20001"/>
+                      <a16:colId xmlns:a16="http://schemas.microsoft.com/office/drawing/2014/main" val="20001"/>
                     </a:ext>
                   </a:extLst>
                 </a:gridCol>
                 <a:gridCol w="685800">
                   <a:extLst>
                     <a:ext uri="{9D8B030D-6E8A-4147-A177-3AD203B41FA5}">
-                      <a16:colId xmlns:a16="http://schemas.microsoft.com/office/drawing/2014/main" xmlns="" val="20002"/>
+                      <a16:colId xmlns:a16="http://schemas.microsoft.com/office/drawing/2014/main" val="20002"/>
                     </a:ext>
                   </a:extLst>
                 </a:gridCol>
                 <a:gridCol w="990600">
                   <a:extLst>
                     <a:ext uri="{9D8B030D-6E8A-4147-A177-3AD203B41FA5}">
-                      <a16:colId xmlns:a16="http://schemas.microsoft.com/office/drawing/2014/main" xmlns="" val="20003"/>
+                      <a16:colId xmlns:a16="http://schemas.microsoft.com/office/drawing/2014/main" val="20003"/>
                     </a:ext>
                   </a:extLst>
                 </a:gridCol>
                 <a:gridCol w="990600">
                   <a:extLst>
                     <a:ext uri="{9D8B030D-6E8A-4147-A177-3AD203B41FA5}">
-                      <a16:colId xmlns:a16="http://schemas.microsoft.com/office/drawing/2014/main" xmlns="" val="20004"/>
+                      <a16:colId xmlns:a16="http://schemas.microsoft.com/office/drawing/2014/main" val="20004"/>
                     </a:ext>
                   </a:extLst>
                 </a:gridCol>
                 <a:gridCol w="1447800">
                   <a:extLst>
                     <a:ext uri="{9D8B030D-6E8A-4147-A177-3AD203B41FA5}">
-                      <a16:colId xmlns:a16="http://schemas.microsoft.com/office/drawing/2014/main" xmlns="" val="20005"/>
+                      <a16:colId xmlns:a16="http://schemas.microsoft.com/office/drawing/2014/main" val="20005"/>
                     </a:ext>
                   </a:extLst>
                 </a:gridCol>
                 <a:gridCol w="1447800">
                   <a:extLst>
                     <a:ext uri="{9D8B030D-6E8A-4147-A177-3AD203B41FA5}">
-                      <a16:colId xmlns:a16="http://schemas.microsoft.com/office/drawing/2014/main" xmlns="" val="20006"/>
+                      <a16:colId xmlns:a16="http://schemas.microsoft.com/office/drawing/2014/main" val="20006"/>
                     </a:ext>
                   </a:extLst>
                 </a:gridCol>
                 <a:gridCol w="1143000">
                   <a:extLst>
                     <a:ext uri="{9D8B030D-6E8A-4147-A177-3AD203B41FA5}">
-                      <a16:colId xmlns:a16="http://schemas.microsoft.com/office/drawing/2014/main" xmlns="" val="20007"/>
+                      <a16:colId xmlns:a16="http://schemas.microsoft.com/office/drawing/2014/main" val="20007"/>
                     </a:ext>
                   </a:extLst>
                 </a:gridCol>
                 <a:gridCol w="838203">
                   <a:extLst>
                     <a:ext uri="{9D8B030D-6E8A-4147-A177-3AD203B41FA5}">
-                      <a16:colId xmlns:a16="http://schemas.microsoft.com/office/drawing/2014/main" xmlns="" val="20008"/>
+                      <a16:colId xmlns:a16="http://schemas.microsoft.com/office/drawing/2014/main" val="20008"/>
                     </a:ext>
                   </a:extLst>
                 </a:gridCol>
@@ -11071,7 +10993,7 @@
                     <a:p>
                       <a:pPr algn="ctr"/>
                       <a:r>
-                        <a:rPr lang="zh-TW" altLang="en-US" sz="1200" b="1" dirty="0" smtClean="0">
+                        <a:rPr lang="zh-TW" altLang="en-US" sz="1200" b="1" dirty="0">
                           <a:solidFill>
                             <a:schemeClr val="bg1"/>
                           </a:solidFill>
@@ -11081,19 +11003,8 @@
                         </a:rPr>
                         <a:t>需求</a:t>
                       </a:r>
-                      <a:r>
-                        <a:rPr lang="en-US" altLang="zh-TW" sz="1200" b="1" dirty="0" smtClean="0">
-                          <a:solidFill>
-                            <a:schemeClr val="bg1"/>
-                          </a:solidFill>
-                          <a:latin typeface="Segoe UI" panose="020B0502040204020203" pitchFamily="34" charset="0"/>
-                          <a:ea typeface="+mn-ea"/>
-                          <a:cs typeface="Segoe UI" panose="020B0502040204020203" pitchFamily="34" charset="0"/>
-                        </a:rPr>
-                        <a:t/>
-                      </a:r>
                       <a:br>
-                        <a:rPr lang="en-US" altLang="zh-TW" sz="1200" b="1" dirty="0" smtClean="0">
+                        <a:rPr lang="en-US" altLang="zh-TW" sz="1200" b="1" dirty="0">
                           <a:solidFill>
                             <a:schemeClr val="bg1"/>
                           </a:solidFill>
@@ -11103,7 +11014,7 @@
                         </a:rPr>
                       </a:br>
                       <a:r>
-                        <a:rPr lang="zh-TW" altLang="en-US" sz="1200" b="1" dirty="0" smtClean="0">
+                        <a:rPr lang="zh-TW" altLang="en-US" sz="1200" b="1" dirty="0">
                           <a:solidFill>
                             <a:schemeClr val="bg1"/>
                           </a:solidFill>
@@ -11113,14 +11024,6 @@
                         </a:rPr>
                         <a:t>單位</a:t>
                       </a:r>
-                      <a:endParaRPr lang="zh-TW" altLang="en-US" sz="1200" b="1" dirty="0">
-                        <a:solidFill>
-                          <a:schemeClr val="bg1"/>
-                        </a:solidFill>
-                        <a:latin typeface="Segoe UI" panose="020B0502040204020203" pitchFamily="34" charset="0"/>
-                        <a:ea typeface="+mn-ea"/>
-                        <a:cs typeface="Segoe UI" panose="020B0502040204020203" pitchFamily="34" charset="0"/>
-                      </a:endParaRPr>
                     </a:p>
                   </a:txBody>
                   <a:tcPr marT="45723" marB="45723" anchor="ctr">
@@ -11182,7 +11085,7 @@
                     <a:p>
                       <a:pPr algn="ctr"/>
                       <a:r>
-                        <a:rPr lang="zh-TW" altLang="en-US" sz="1200" b="1" dirty="0" smtClean="0">
+                        <a:rPr lang="zh-TW" altLang="en-US" sz="1200" b="1" dirty="0">
                           <a:solidFill>
                             <a:schemeClr val="bg1"/>
                           </a:solidFill>
@@ -11192,14 +11095,6 @@
                         </a:rPr>
                         <a:t>開始時間</a:t>
                       </a:r>
-                      <a:endParaRPr lang="zh-TW" altLang="en-US" sz="1200" b="1" dirty="0">
-                        <a:solidFill>
-                          <a:schemeClr val="bg1"/>
-                        </a:solidFill>
-                        <a:latin typeface="Segoe UI" panose="020B0502040204020203" pitchFamily="34" charset="0"/>
-                        <a:ea typeface="+mn-ea"/>
-                        <a:cs typeface="Segoe UI" panose="020B0502040204020203" pitchFamily="34" charset="0"/>
-                      </a:endParaRPr>
                     </a:p>
                   </a:txBody>
                   <a:tcPr marT="45723" marB="45723" anchor="ctr">
@@ -11261,7 +11156,7 @@
                     <a:p>
                       <a:pPr algn="ctr"/>
                       <a:r>
-                        <a:rPr lang="zh-TW" altLang="en-US" sz="1200" b="1" dirty="0" smtClean="0">
+                        <a:rPr lang="zh-TW" altLang="en-US" sz="1200" b="1" dirty="0">
                           <a:solidFill>
                             <a:schemeClr val="bg1"/>
                           </a:solidFill>
@@ -11271,19 +11166,8 @@
                         </a:rPr>
                         <a:t>預計</a:t>
                       </a:r>
-                      <a:r>
-                        <a:rPr lang="en-US" altLang="zh-TW" sz="1200" b="1" dirty="0" smtClean="0">
-                          <a:solidFill>
-                            <a:schemeClr val="bg1"/>
-                          </a:solidFill>
-                          <a:latin typeface="Segoe UI" panose="020B0502040204020203" pitchFamily="34" charset="0"/>
-                          <a:ea typeface="+mn-ea"/>
-                          <a:cs typeface="Segoe UI" panose="020B0502040204020203" pitchFamily="34" charset="0"/>
-                        </a:rPr>
-                        <a:t/>
-                      </a:r>
                       <a:br>
-                        <a:rPr lang="en-US" altLang="zh-TW" sz="1200" b="1" dirty="0" smtClean="0">
+                        <a:rPr lang="en-US" altLang="zh-TW" sz="1200" b="1" dirty="0">
                           <a:solidFill>
                             <a:schemeClr val="bg1"/>
                           </a:solidFill>
@@ -11293,17 +11177,6 @@
                         </a:rPr>
                       </a:br>
                       <a:r>
-                        <a:rPr lang="zh-TW" altLang="en-US" sz="1200" b="1" dirty="0" smtClean="0">
-                          <a:solidFill>
-                            <a:schemeClr val="bg1"/>
-                          </a:solidFill>
-                          <a:latin typeface="Segoe UI" panose="020B0502040204020203" pitchFamily="34" charset="0"/>
-                          <a:ea typeface="+mn-ea"/>
-                          <a:cs typeface="Segoe UI" panose="020B0502040204020203" pitchFamily="34" charset="0"/>
-                        </a:rPr>
-                        <a:t>完成</a:t>
-                      </a:r>
-                      <a:r>
                         <a:rPr lang="zh-TW" altLang="en-US" sz="1200" b="1" dirty="0">
                           <a:solidFill>
                             <a:schemeClr val="bg1"/>
@@ -11312,7 +11185,7 @@
                           <a:ea typeface="+mn-ea"/>
                           <a:cs typeface="Segoe UI" panose="020B0502040204020203" pitchFamily="34" charset="0"/>
                         </a:rPr>
-                        <a:t>時間</a:t>
+                        <a:t>完成時間</a:t>
                       </a:r>
                     </a:p>
                   </a:txBody>
@@ -11654,7 +11527,7 @@
                 </a:tc>
                 <a:extLst>
                   <a:ext uri="{0D108BD9-81ED-4DB2-BD59-A6C34878D82A}">
-                    <a16:rowId xmlns:a16="http://schemas.microsoft.com/office/drawing/2014/main" xmlns="" val="10000"/>
+                    <a16:rowId xmlns:a16="http://schemas.microsoft.com/office/drawing/2014/main" val="10000"/>
                   </a:ext>
                 </a:extLst>
               </a:tr>
@@ -11666,7 +11539,7 @@
                     <a:p>
                       <a:pPr algn="ctr"/>
                       <a:r>
-                        <a:rPr lang="en-US" altLang="zh-TW" sz="1400" kern="1200" dirty="0" smtClean="0">
+                        <a:rPr lang="en-US" altLang="zh-TW" sz="1400" kern="1200" dirty="0">
                           <a:solidFill>
                             <a:schemeClr val="tx1"/>
                           </a:solidFill>
@@ -11859,7 +11732,7 @@
                         <a:defRPr/>
                       </a:pPr>
                       <a:r>
-                        <a:rPr lang="zh-TW" altLang="en-US" sz="1200" kern="1200" dirty="0" smtClean="0">
+                        <a:rPr lang="zh-TW" altLang="en-US" sz="1200" kern="1200" dirty="0">
                           <a:solidFill>
                             <a:schemeClr val="tx1"/>
                           </a:solidFill>
@@ -11869,19 +11742,8 @@
                         </a:rPr>
                         <a:t>王孟坤</a:t>
                       </a:r>
-                      <a:r>
-                        <a:rPr lang="en-US" altLang="zh-TW" sz="1200" kern="1200" dirty="0" smtClean="0">
-                          <a:solidFill>
-                            <a:schemeClr val="tx1"/>
-                          </a:solidFill>
-                          <a:latin typeface="Segoe UI" panose="020B0502040204020203" pitchFamily="34" charset="0"/>
-                          <a:ea typeface="+mn-ea"/>
-                          <a:cs typeface="Segoe UI" panose="020B0502040204020203" pitchFamily="34" charset="0"/>
-                        </a:rPr>
-                        <a:t/>
-                      </a:r>
                       <a:br>
-                        <a:rPr lang="en-US" altLang="zh-TW" sz="1200" kern="1200" dirty="0" smtClean="0">
+                        <a:rPr lang="en-US" altLang="zh-TW" sz="1200" kern="1200" dirty="0">
                           <a:solidFill>
                             <a:schemeClr val="tx1"/>
                           </a:solidFill>
@@ -11891,7 +11753,7 @@
                         </a:rPr>
                       </a:br>
                       <a:r>
-                        <a:rPr lang="zh-TW" altLang="en-US" sz="1200" kern="1200" dirty="0" smtClean="0">
+                        <a:rPr lang="zh-TW" altLang="en-US" sz="1200" kern="1200" dirty="0">
                           <a:solidFill>
                             <a:schemeClr val="tx1"/>
                           </a:solidFill>
@@ -11899,27 +11761,8 @@
                           <a:ea typeface="+mn-ea"/>
                           <a:cs typeface="Segoe UI" panose="020B0502040204020203" pitchFamily="34" charset="0"/>
                         </a:rPr>
-                        <a:t>特</a:t>
+                        <a:t>特助</a:t>
                       </a:r>
-                      <a:r>
-                        <a:rPr lang="zh-TW" altLang="en-US" sz="1200" kern="1200" dirty="0" smtClean="0">
-                          <a:solidFill>
-                            <a:schemeClr val="tx1"/>
-                          </a:solidFill>
-                          <a:latin typeface="Segoe UI" panose="020B0502040204020203" pitchFamily="34" charset="0"/>
-                          <a:ea typeface="+mn-ea"/>
-                          <a:cs typeface="Segoe UI" panose="020B0502040204020203" pitchFamily="34" charset="0"/>
-                        </a:rPr>
-                        <a:t>助</a:t>
-                      </a:r>
-                      <a:endParaRPr lang="zh-TW" altLang="en-US" sz="1200" kern="1200" dirty="0">
-                        <a:solidFill>
-                          <a:schemeClr val="tx1"/>
-                        </a:solidFill>
-                        <a:latin typeface="Segoe UI" panose="020B0502040204020203" pitchFamily="34" charset="0"/>
-                        <a:ea typeface="+mn-ea"/>
-                        <a:cs typeface="Segoe UI" panose="020B0502040204020203" pitchFamily="34" charset="0"/>
-                      </a:endParaRPr>
                     </a:p>
                   </a:txBody>
                   <a:tcPr marT="45723" marB="45723" anchor="ctr">
@@ -12077,7 +11920,7 @@
                         <a:defRPr/>
                       </a:pPr>
                       <a:r>
-                        <a:rPr lang="en-US" altLang="zh-TW" sz="1200" b="0" strike="sngStrike" baseline="0" dirty="0" smtClean="0">
+                        <a:rPr lang="en-US" altLang="zh-TW" sz="1200" b="0" strike="sngStrike" baseline="0" dirty="0">
                           <a:solidFill>
                             <a:schemeClr val="tx1"/>
                           </a:solidFill>
@@ -12108,7 +11951,7 @@
                         <a:defRPr/>
                       </a:pPr>
                       <a:r>
-                        <a:rPr lang="zh-TW" altLang="en-US" sz="1200" b="0" strike="noStrike" baseline="0" dirty="0" smtClean="0">
+                        <a:rPr lang="zh-TW" altLang="en-US" sz="1200" b="0" strike="noStrike" baseline="0" dirty="0">
                           <a:solidFill>
                             <a:schemeClr val="tx1"/>
                           </a:solidFill>
@@ -12200,7 +12043,7 @@
                         <a:tabLst/>
                         <a:defRPr/>
                       </a:pPr>
-                      <a:endParaRPr lang="en-US" altLang="zh-TW" sz="1200" dirty="0" smtClean="0">
+                      <a:endParaRPr lang="en-US" altLang="zh-TW" sz="1200" dirty="0">
                         <a:latin typeface="Segoe UI" panose="020B0502040204020203" pitchFamily="34" charset="0"/>
                         <a:ea typeface="+mn-ea"/>
                         <a:cs typeface="Segoe UI" panose="020B0502040204020203" pitchFamily="34" charset="0"/>
@@ -12278,7 +12121,7 @@
                         <a:defRPr/>
                       </a:pPr>
                       <a:r>
-                        <a:rPr lang="en-US" altLang="zh-TW" sz="1200" dirty="0" smtClean="0">
+                        <a:rPr lang="en-US" altLang="zh-TW" sz="1200" dirty="0">
                           <a:latin typeface="Segoe UI" panose="020B0502040204020203" pitchFamily="34" charset="0"/>
                           <a:ea typeface="+mn-ea"/>
                           <a:cs typeface="Segoe UI" panose="020B0502040204020203" pitchFamily="34" charset="0"/>
@@ -12286,7 +12129,7 @@
                         <a:t>X/Y Pitch</a:t>
                       </a:r>
                       <a:r>
-                        <a:rPr lang="zh-TW" altLang="en-US" sz="1200" dirty="0" smtClean="0">
+                        <a:rPr lang="zh-TW" altLang="en-US" sz="1200" dirty="0">
                           <a:latin typeface="Segoe UI" panose="020B0502040204020203" pitchFamily="34" charset="0"/>
                           <a:ea typeface="+mn-ea"/>
                           <a:cs typeface="Segoe UI" panose="020B0502040204020203" pitchFamily="34" charset="0"/>
@@ -12294,7 +12137,7 @@
                         <a:t>，且可由</a:t>
                       </a:r>
                       <a:r>
-                        <a:rPr lang="en-US" altLang="zh-TW" sz="1200" dirty="0" smtClean="0">
+                        <a:rPr lang="en-US" altLang="zh-TW" sz="1200" dirty="0">
                           <a:latin typeface="Segoe UI" panose="020B0502040204020203" pitchFamily="34" charset="0"/>
                           <a:ea typeface="+mn-ea"/>
                           <a:cs typeface="Segoe UI" panose="020B0502040204020203" pitchFamily="34" charset="0"/>
@@ -12302,7 +12145,7 @@
                         <a:t>EXCEL</a:t>
                       </a:r>
                       <a:r>
-                        <a:rPr lang="zh-TW" altLang="en-US" sz="1200" dirty="0" smtClean="0">
+                        <a:rPr lang="zh-TW" altLang="en-US" sz="1200" dirty="0">
                           <a:latin typeface="Segoe UI" panose="020B0502040204020203" pitchFamily="34" charset="0"/>
                           <a:ea typeface="+mn-ea"/>
                           <a:cs typeface="Segoe UI" panose="020B0502040204020203" pitchFamily="34" charset="0"/>
@@ -12329,7 +12172,7 @@
                         <a:defRPr/>
                       </a:pPr>
                       <a:r>
-                        <a:rPr lang="en-US" altLang="zh-TW" sz="1200" dirty="0" smtClean="0">
+                        <a:rPr lang="en-US" altLang="zh-TW" sz="1200" dirty="0">
                           <a:latin typeface="Segoe UI" panose="020B0502040204020203" pitchFamily="34" charset="0"/>
                           <a:ea typeface="+mn-ea"/>
                           <a:cs typeface="Segoe UI" panose="020B0502040204020203" pitchFamily="34" charset="0"/>
@@ -12337,7 +12180,7 @@
                         <a:t>EXCEL</a:t>
                       </a:r>
                       <a:r>
-                        <a:rPr lang="zh-TW" altLang="en-US" sz="1200" dirty="0" smtClean="0">
+                        <a:rPr lang="zh-TW" altLang="en-US" sz="1200" dirty="0">
                           <a:latin typeface="Segoe UI" panose="020B0502040204020203" pitchFamily="34" charset="0"/>
                           <a:ea typeface="+mn-ea"/>
                           <a:cs typeface="Segoe UI" panose="020B0502040204020203" pitchFamily="34" charset="0"/>
@@ -12345,7 +12188,7 @@
                         <a:t>報表加入</a:t>
                       </a:r>
                       <a:r>
-                        <a:rPr lang="en-US" altLang="zh-TW" sz="1200" dirty="0" smtClean="0">
+                        <a:rPr lang="en-US" altLang="zh-TW" sz="1200" dirty="0">
                           <a:latin typeface="Segoe UI" panose="020B0502040204020203" pitchFamily="34" charset="0"/>
                           <a:ea typeface="+mn-ea"/>
                           <a:cs typeface="Segoe UI" panose="020B0502040204020203" pitchFamily="34" charset="0"/>
@@ -12353,14 +12196,14 @@
                         <a:t>Y</a:t>
                       </a:r>
                       <a:r>
-                        <a:rPr lang="zh-TW" altLang="en-US" sz="1200" dirty="0" smtClean="0">
+                        <a:rPr lang="zh-TW" altLang="en-US" sz="1200" dirty="0">
                           <a:latin typeface="Segoe UI" panose="020B0502040204020203" pitchFamily="34" charset="0"/>
                           <a:ea typeface="+mn-ea"/>
                           <a:cs typeface="Segoe UI" panose="020B0502040204020203" pitchFamily="34" charset="0"/>
                         </a:rPr>
                         <a:t>的標準，以及夾角</a:t>
                       </a:r>
-                      <a:endParaRPr lang="en-US" altLang="zh-TW" sz="1200" dirty="0" smtClean="0">
+                      <a:endParaRPr lang="en-US" altLang="zh-TW" sz="1200" dirty="0">
                         <a:latin typeface="Segoe UI" panose="020B0502040204020203" pitchFamily="34" charset="0"/>
                         <a:ea typeface="+mn-ea"/>
                         <a:cs typeface="Segoe UI" panose="020B0502040204020203" pitchFamily="34" charset="0"/>
@@ -12385,14 +12228,14 @@
                         <a:defRPr/>
                       </a:pPr>
                       <a:r>
-                        <a:rPr lang="zh-TW" altLang="en-US" sz="1200" dirty="0" smtClean="0">
+                        <a:rPr lang="zh-TW" altLang="en-US" sz="1200" dirty="0">
                           <a:latin typeface="Segoe UI" panose="020B0502040204020203" pitchFamily="34" charset="0"/>
                           <a:ea typeface="+mn-ea"/>
                           <a:cs typeface="Segoe UI" panose="020B0502040204020203" pitchFamily="34" charset="0"/>
                         </a:rPr>
                         <a:t>優化截圖</a:t>
                       </a:r>
-                      <a:endParaRPr lang="en-US" altLang="zh-TW" sz="1200" dirty="0" smtClean="0">
+                      <a:endParaRPr lang="en-US" altLang="zh-TW" sz="1200" dirty="0">
                         <a:latin typeface="Segoe UI" panose="020B0502040204020203" pitchFamily="34" charset="0"/>
                         <a:ea typeface="+mn-ea"/>
                         <a:cs typeface="Segoe UI" panose="020B0502040204020203" pitchFamily="34" charset="0"/>
@@ -12417,7 +12260,7 @@
                         <a:defRPr/>
                       </a:pPr>
                       <a:r>
-                        <a:rPr lang="en-US" altLang="zh-TW" sz="1200" dirty="0" smtClean="0">
+                        <a:rPr lang="en-US" altLang="zh-TW" sz="1200" dirty="0">
                           <a:latin typeface="Segoe UI" panose="020B0502040204020203" pitchFamily="34" charset="0"/>
                           <a:ea typeface="+mn-ea"/>
                           <a:cs typeface="Segoe UI" panose="020B0502040204020203" pitchFamily="34" charset="0"/>
@@ -12425,44 +12268,12 @@
                         <a:t>UI</a:t>
                       </a:r>
                       <a:r>
-                        <a:rPr lang="zh-TW" altLang="en-US" sz="1200" dirty="0" smtClean="0">
+                        <a:rPr lang="zh-TW" altLang="en-US" sz="1200" dirty="0">
                           <a:latin typeface="Segoe UI" panose="020B0502040204020203" pitchFamily="34" charset="0"/>
                           <a:ea typeface="+mn-ea"/>
                           <a:cs typeface="Segoe UI" panose="020B0502040204020203" pitchFamily="34" charset="0"/>
                         </a:rPr>
                         <a:t>調整</a:t>
-                      </a:r>
-                      <a:endParaRPr lang="en-US" altLang="zh-TW" sz="1200" dirty="0" smtClean="0">
-                        <a:latin typeface="Segoe UI" panose="020B0502040204020203" pitchFamily="34" charset="0"/>
-                        <a:ea typeface="+mn-ea"/>
-                        <a:cs typeface="Segoe UI" panose="020B0502040204020203" pitchFamily="34" charset="0"/>
-                      </a:endParaRPr>
-                    </a:p>
-                    <a:p>
-                      <a:pPr marL="171450" marR="0" lvl="0" indent="-171450" algn="l" defTabSz="914400" rtl="0" eaLnBrk="1" fontAlgn="auto" latinLnBrk="0" hangingPunct="1">
-                        <a:lnSpc>
-                          <a:spcPct val="100000"/>
-                        </a:lnSpc>
-                        <a:spcBef>
-                          <a:spcPts val="0"/>
-                        </a:spcBef>
-                        <a:spcAft>
-                          <a:spcPts val="0"/>
-                        </a:spcAft>
-                        <a:buClrTx/>
-                        <a:buSzTx/>
-                        <a:buFont typeface="Arial" pitchFamily="34" charset="0"/>
-                        <a:buChar char="•"/>
-                        <a:tabLst/>
-                        <a:defRPr/>
-                      </a:pPr>
-                      <a:r>
-                        <a:rPr lang="zh-TW" altLang="en-US" sz="1200" dirty="0" smtClean="0">
-                          <a:latin typeface="Segoe UI" panose="020B0502040204020203" pitchFamily="34" charset="0"/>
-                          <a:ea typeface="+mn-ea"/>
-                          <a:cs typeface="Segoe UI" panose="020B0502040204020203" pitchFamily="34" charset="0"/>
-                        </a:rPr>
-                        <a:t>預設顯示有效點</a:t>
                       </a:r>
                     </a:p>
                   </a:txBody>
@@ -12731,7 +12542,7 @@
                 </a:tc>
                 <a:extLst>
                   <a:ext uri="{0D108BD9-81ED-4DB2-BD59-A6C34878D82A}">
-                    <a16:rowId xmlns:a16="http://schemas.microsoft.com/office/drawing/2014/main" xmlns="" val="10001"/>
+                    <a16:rowId xmlns:a16="http://schemas.microsoft.com/office/drawing/2014/main" val="10001"/>
                   </a:ext>
                 </a:extLst>
               </a:tr>
@@ -13426,7 +13237,7 @@
                 </a:tc>
                 <a:extLst>
                   <a:ext uri="{0D108BD9-81ED-4DB2-BD59-A6C34878D82A}">
-                    <a16:rowId xmlns:a16="http://schemas.microsoft.com/office/drawing/2014/main" xmlns="" val="10002"/>
+                    <a16:rowId xmlns:a16="http://schemas.microsoft.com/office/drawing/2014/main" val="10002"/>
                   </a:ext>
                 </a:extLst>
               </a:tr>
@@ -13839,7 +13650,7 @@
                         <a:tabLst/>
                         <a:defRPr/>
                       </a:pPr>
-                      <a:endParaRPr lang="en-US" altLang="zh-TW" sz="1200" dirty="0" smtClean="0">
+                      <a:endParaRPr lang="en-US" altLang="zh-TW" sz="1200" dirty="0">
                         <a:latin typeface="Segoe UI" panose="020B0502040204020203" pitchFamily="34" charset="0"/>
                         <a:ea typeface="+mn-ea"/>
                         <a:cs typeface="Segoe UI" panose="020B0502040204020203" pitchFamily="34" charset="0"/>
@@ -14117,7 +13928,7 @@
                 </a:tc>
                 <a:extLst>
                   <a:ext uri="{0D108BD9-81ED-4DB2-BD59-A6C34878D82A}">
-                    <a16:rowId xmlns:a16="http://schemas.microsoft.com/office/drawing/2014/main" xmlns="" val="10003"/>
+                    <a16:rowId xmlns:a16="http://schemas.microsoft.com/office/drawing/2014/main" val="10003"/>
                   </a:ext>
                 </a:extLst>
               </a:tr>
@@ -14145,7 +13956,6 @@
             <a:headEnd type="none" w="med" len="med"/>
             <a:tailEnd type="none" w="med" len="med"/>
           </a:ln>
-          <a:extLst/>
         </p:spPr>
         <p:style>
           <a:lnRef idx="1">
@@ -14185,7 +13995,7 @@
               <a:buNone/>
               <a:tabLst/>
             </a:pPr>
-            <a:endParaRPr kumimoji="1" lang="zh-TW" altLang="en-US" sz="2800" b="1" i="0" u="none" strike="noStrike" cap="none" normalizeH="0" baseline="0" smtClean="0">
+            <a:endParaRPr kumimoji="1" lang="zh-TW" altLang="en-US" sz="2800" b="1" i="0" u="none" strike="noStrike" cap="none" normalizeH="0" baseline="0">
               <a:ln>
                 <a:noFill/>
               </a:ln>
@@ -14210,13 +14020,6 @@
   <p:clrMapOvr>
     <a:masterClrMapping/>
   </p:clrMapOvr>
-  <p:timing>
-    <p:tnLst>
-      <p:par>
-        <p:cTn id="1" dur="indefinite" restart="never" nodeType="tmRoot"/>
-      </p:par>
-    </p:tnLst>
-  </p:timing>
 </p:sld>
 </file>
 
@@ -14564,56 +14367,56 @@
                 <a:gridCol w="409570">
                   <a:extLst>
                     <a:ext uri="{9D8B030D-6E8A-4147-A177-3AD203B41FA5}">
-                      <a16:colId xmlns:a16="http://schemas.microsoft.com/office/drawing/2014/main" xmlns="" val="20000"/>
+                      <a16:colId xmlns:a16="http://schemas.microsoft.com/office/drawing/2014/main" val="20000"/>
                     </a:ext>
                   </a:extLst>
                 </a:gridCol>
                 <a:gridCol w="1066800">
                   <a:extLst>
                     <a:ext uri="{9D8B030D-6E8A-4147-A177-3AD203B41FA5}">
-                      <a16:colId xmlns:a16="http://schemas.microsoft.com/office/drawing/2014/main" xmlns="" val="20001"/>
+                      <a16:colId xmlns:a16="http://schemas.microsoft.com/office/drawing/2014/main" val="20001"/>
                     </a:ext>
                   </a:extLst>
                 </a:gridCol>
                 <a:gridCol w="798342">
                   <a:extLst>
                     <a:ext uri="{9D8B030D-6E8A-4147-A177-3AD203B41FA5}">
-                      <a16:colId xmlns:a16="http://schemas.microsoft.com/office/drawing/2014/main" xmlns="" val="20002"/>
+                      <a16:colId xmlns:a16="http://schemas.microsoft.com/office/drawing/2014/main" val="20002"/>
                     </a:ext>
                   </a:extLst>
                 </a:gridCol>
                 <a:gridCol w="1080232">
                   <a:extLst>
                     <a:ext uri="{9D8B030D-6E8A-4147-A177-3AD203B41FA5}">
-                      <a16:colId xmlns:a16="http://schemas.microsoft.com/office/drawing/2014/main" xmlns="" val="20003"/>
+                      <a16:colId xmlns:a16="http://schemas.microsoft.com/office/drawing/2014/main" val="20003"/>
                     </a:ext>
                   </a:extLst>
                 </a:gridCol>
                 <a:gridCol w="1080232">
                   <a:extLst>
                     <a:ext uri="{9D8B030D-6E8A-4147-A177-3AD203B41FA5}">
-                      <a16:colId xmlns:a16="http://schemas.microsoft.com/office/drawing/2014/main" xmlns="" val="20004"/>
+                      <a16:colId xmlns:a16="http://schemas.microsoft.com/office/drawing/2014/main" val="20004"/>
                     </a:ext>
                   </a:extLst>
                 </a:gridCol>
                 <a:gridCol w="1578800">
                   <a:extLst>
                     <a:ext uri="{9D8B030D-6E8A-4147-A177-3AD203B41FA5}">
-                      <a16:colId xmlns:a16="http://schemas.microsoft.com/office/drawing/2014/main" xmlns="" val="20005"/>
+                      <a16:colId xmlns:a16="http://schemas.microsoft.com/office/drawing/2014/main" val="20005"/>
                     </a:ext>
                   </a:extLst>
                 </a:gridCol>
                 <a:gridCol w="1578800">
                   <a:extLst>
                     <a:ext uri="{9D8B030D-6E8A-4147-A177-3AD203B41FA5}">
-                      <a16:colId xmlns:a16="http://schemas.microsoft.com/office/drawing/2014/main" xmlns="" val="20006"/>
+                      <a16:colId xmlns:a16="http://schemas.microsoft.com/office/drawing/2014/main" val="20006"/>
                     </a:ext>
                   </a:extLst>
                 </a:gridCol>
                 <a:gridCol w="1351194">
                   <a:extLst>
                     <a:ext uri="{9D8B030D-6E8A-4147-A177-3AD203B41FA5}">
-                      <a16:colId xmlns:a16="http://schemas.microsoft.com/office/drawing/2014/main" xmlns="" val="20007"/>
+                      <a16:colId xmlns:a16="http://schemas.microsoft.com/office/drawing/2014/main" val="20007"/>
                     </a:ext>
                   </a:extLst>
                 </a:gridCol>
@@ -14705,7 +14508,7 @@
                     <a:p>
                       <a:pPr algn="ctr"/>
                       <a:r>
-                        <a:rPr lang="zh-TW" altLang="en-US" sz="1200" b="1" dirty="0" smtClean="0">
+                        <a:rPr lang="zh-TW" altLang="en-US" sz="1200" b="1" dirty="0">
                           <a:solidFill>
                             <a:schemeClr val="bg1"/>
                           </a:solidFill>
@@ -14715,14 +14518,6 @@
                         </a:rPr>
                         <a:t>工作項目</a:t>
                       </a:r>
-                      <a:endParaRPr lang="zh-TW" altLang="en-US" sz="1200" b="1" dirty="0">
-                        <a:solidFill>
-                          <a:schemeClr val="bg1"/>
-                        </a:solidFill>
-                        <a:latin typeface="Segoe UI" panose="020B0502040204020203" pitchFamily="34" charset="0"/>
-                        <a:ea typeface="+mn-ea"/>
-                        <a:cs typeface="Segoe UI" panose="020B0502040204020203" pitchFamily="34" charset="0"/>
-                      </a:endParaRPr>
                     </a:p>
                   </a:txBody>
                   <a:tcPr marT="45723" marB="45723" anchor="ctr">
@@ -14784,7 +14579,7 @@
                     <a:p>
                       <a:pPr algn="ctr"/>
                       <a:r>
-                        <a:rPr lang="zh-TW" altLang="en-US" sz="1200" b="1" dirty="0" smtClean="0">
+                        <a:rPr lang="zh-TW" altLang="en-US" sz="1200" b="1" dirty="0">
                           <a:solidFill>
                             <a:schemeClr val="bg1"/>
                           </a:solidFill>
@@ -14794,19 +14589,8 @@
                         </a:rPr>
                         <a:t>需求</a:t>
                       </a:r>
-                      <a:r>
-                        <a:rPr lang="en-US" altLang="zh-TW" sz="1200" b="1" dirty="0" smtClean="0">
-                          <a:solidFill>
-                            <a:schemeClr val="bg1"/>
-                          </a:solidFill>
-                          <a:latin typeface="Segoe UI" panose="020B0502040204020203" pitchFamily="34" charset="0"/>
-                          <a:ea typeface="+mn-ea"/>
-                          <a:cs typeface="Segoe UI" panose="020B0502040204020203" pitchFamily="34" charset="0"/>
-                        </a:rPr>
-                        <a:t/>
-                      </a:r>
                       <a:br>
-                        <a:rPr lang="en-US" altLang="zh-TW" sz="1200" b="1" dirty="0" smtClean="0">
+                        <a:rPr lang="en-US" altLang="zh-TW" sz="1200" b="1" dirty="0">
                           <a:solidFill>
                             <a:schemeClr val="bg1"/>
                           </a:solidFill>
@@ -14816,7 +14600,7 @@
                         </a:rPr>
                       </a:br>
                       <a:r>
-                        <a:rPr lang="zh-TW" altLang="en-US" sz="1200" b="1" dirty="0" smtClean="0">
+                        <a:rPr lang="zh-TW" altLang="en-US" sz="1200" b="1" dirty="0">
                           <a:solidFill>
                             <a:schemeClr val="bg1"/>
                           </a:solidFill>
@@ -14826,14 +14610,6 @@
                         </a:rPr>
                         <a:t>單位</a:t>
                       </a:r>
-                      <a:endParaRPr lang="zh-TW" altLang="en-US" sz="1200" b="1" dirty="0">
-                        <a:solidFill>
-                          <a:schemeClr val="bg1"/>
-                        </a:solidFill>
-                        <a:latin typeface="Segoe UI" panose="020B0502040204020203" pitchFamily="34" charset="0"/>
-                        <a:ea typeface="+mn-ea"/>
-                        <a:cs typeface="Segoe UI" panose="020B0502040204020203" pitchFamily="34" charset="0"/>
-                      </a:endParaRPr>
                     </a:p>
                   </a:txBody>
                   <a:tcPr marT="45723" marB="45723" anchor="ctr">
@@ -14895,7 +14671,7 @@
                     <a:p>
                       <a:pPr algn="ctr"/>
                       <a:r>
-                        <a:rPr lang="zh-TW" altLang="en-US" sz="1200" b="1" dirty="0" smtClean="0">
+                        <a:rPr lang="zh-TW" altLang="en-US" sz="1200" b="1" dirty="0">
                           <a:solidFill>
                             <a:schemeClr val="bg1"/>
                           </a:solidFill>
@@ -14905,14 +14681,6 @@
                         </a:rPr>
                         <a:t>開始時間</a:t>
                       </a:r>
-                      <a:endParaRPr lang="zh-TW" altLang="en-US" sz="1200" b="1" dirty="0">
-                        <a:solidFill>
-                          <a:schemeClr val="bg1"/>
-                        </a:solidFill>
-                        <a:latin typeface="Segoe UI" panose="020B0502040204020203" pitchFamily="34" charset="0"/>
-                        <a:ea typeface="+mn-ea"/>
-                        <a:cs typeface="Segoe UI" panose="020B0502040204020203" pitchFamily="34" charset="0"/>
-                      </a:endParaRPr>
                     </a:p>
                   </a:txBody>
                   <a:tcPr marT="45723" marB="45723" anchor="ctr">
@@ -14974,7 +14742,7 @@
                     <a:p>
                       <a:pPr algn="ctr"/>
                       <a:r>
-                        <a:rPr lang="zh-TW" altLang="en-US" sz="1200" b="1" dirty="0" smtClean="0">
+                        <a:rPr lang="zh-TW" altLang="en-US" sz="1200" b="1" dirty="0">
                           <a:solidFill>
                             <a:schemeClr val="bg1"/>
                           </a:solidFill>
@@ -14984,19 +14752,8 @@
                         </a:rPr>
                         <a:t>預計</a:t>
                       </a:r>
-                      <a:r>
-                        <a:rPr lang="en-US" altLang="zh-TW" sz="1200" b="1" dirty="0" smtClean="0">
-                          <a:solidFill>
-                            <a:schemeClr val="bg1"/>
-                          </a:solidFill>
-                          <a:latin typeface="Segoe UI" panose="020B0502040204020203" pitchFamily="34" charset="0"/>
-                          <a:ea typeface="+mn-ea"/>
-                          <a:cs typeface="Segoe UI" panose="020B0502040204020203" pitchFamily="34" charset="0"/>
-                        </a:rPr>
-                        <a:t/>
-                      </a:r>
                       <a:br>
-                        <a:rPr lang="en-US" altLang="zh-TW" sz="1200" b="1" dirty="0" smtClean="0">
+                        <a:rPr lang="en-US" altLang="zh-TW" sz="1200" b="1" dirty="0">
                           <a:solidFill>
                             <a:schemeClr val="bg1"/>
                           </a:solidFill>
@@ -15006,17 +14763,6 @@
                         </a:rPr>
                       </a:br>
                       <a:r>
-                        <a:rPr lang="zh-TW" altLang="en-US" sz="1200" b="1" dirty="0" smtClean="0">
-                          <a:solidFill>
-                            <a:schemeClr val="bg1"/>
-                          </a:solidFill>
-                          <a:latin typeface="Segoe UI" panose="020B0502040204020203" pitchFamily="34" charset="0"/>
-                          <a:ea typeface="+mn-ea"/>
-                          <a:cs typeface="Segoe UI" panose="020B0502040204020203" pitchFamily="34" charset="0"/>
-                        </a:rPr>
-                        <a:t>完成</a:t>
-                      </a:r>
-                      <a:r>
                         <a:rPr lang="zh-TW" altLang="en-US" sz="1200" b="1" dirty="0">
                           <a:solidFill>
                             <a:schemeClr val="bg1"/>
@@ -15025,7 +14771,7 @@
                           <a:ea typeface="+mn-ea"/>
                           <a:cs typeface="Segoe UI" panose="020B0502040204020203" pitchFamily="34" charset="0"/>
                         </a:rPr>
-                        <a:t>時間</a:t>
+                        <a:t>完成時間</a:t>
                       </a:r>
                     </a:p>
                   </a:txBody>
@@ -15230,7 +14976,7 @@
                     <a:p>
                       <a:pPr algn="ctr"/>
                       <a:r>
-                        <a:rPr lang="zh-TW" altLang="en-US" sz="1200" b="1" dirty="0" smtClean="0">
+                        <a:rPr lang="zh-TW" altLang="en-US" sz="1200" b="1" dirty="0">
                           <a:solidFill>
                             <a:schemeClr val="bg1"/>
                           </a:solidFill>
@@ -15240,14 +14986,6 @@
                         </a:rPr>
                         <a:t>執行狀態</a:t>
                       </a:r>
-                      <a:endParaRPr lang="zh-TW" altLang="en-US" sz="1200" b="1" dirty="0">
-                        <a:solidFill>
-                          <a:schemeClr val="bg1"/>
-                        </a:solidFill>
-                        <a:latin typeface="Segoe UI" panose="020B0502040204020203" pitchFamily="34" charset="0"/>
-                        <a:ea typeface="+mn-ea"/>
-                        <a:cs typeface="Segoe UI" panose="020B0502040204020203" pitchFamily="34" charset="0"/>
-                      </a:endParaRPr>
                     </a:p>
                   </a:txBody>
                   <a:tcPr marT="45723" marB="45723" anchor="ctr">
@@ -15304,7 +15042,7 @@
                 </a:tc>
                 <a:extLst>
                   <a:ext uri="{0D108BD9-81ED-4DB2-BD59-A6C34878D82A}">
-                    <a16:rowId xmlns:a16="http://schemas.microsoft.com/office/drawing/2014/main" xmlns="" val="10000"/>
+                    <a16:rowId xmlns:a16="http://schemas.microsoft.com/office/drawing/2014/main" val="10000"/>
                   </a:ext>
                 </a:extLst>
               </a:tr>
@@ -15316,7 +15054,7 @@
                     <a:p>
                       <a:pPr algn="ctr"/>
                       <a:r>
-                        <a:rPr lang="en-US" altLang="zh-TW" sz="1400" kern="1200" dirty="0" smtClean="0">
+                        <a:rPr lang="en-US" altLang="zh-TW" sz="1400" kern="1200" dirty="0">
                           <a:solidFill>
                             <a:schemeClr val="tx1"/>
                           </a:solidFill>
@@ -15407,7 +15145,7 @@
                         <a:defRPr/>
                       </a:pPr>
                       <a:r>
-                        <a:rPr lang="zh-TW" altLang="en-US" sz="1200" kern="1200" dirty="0" smtClean="0">
+                        <a:rPr lang="zh-TW" altLang="en-US" sz="1200" kern="1200" dirty="0">
                           <a:solidFill>
                             <a:schemeClr val="tx1"/>
                           </a:solidFill>
@@ -15498,7 +15236,7 @@
                         <a:defRPr/>
                       </a:pPr>
                       <a:r>
-                        <a:rPr lang="zh-TW" altLang="en-US" sz="1200" kern="1200" dirty="0" smtClean="0">
+                        <a:rPr lang="zh-TW" altLang="en-US" sz="1200" kern="1200" dirty="0">
                           <a:solidFill>
                             <a:schemeClr val="tx1"/>
                           </a:solidFill>
@@ -15508,14 +15246,6 @@
                         </a:rPr>
                         <a:t>區北廠</a:t>
                       </a:r>
-                      <a:endParaRPr lang="zh-TW" altLang="en-US" sz="1200" kern="1200" dirty="0">
-                        <a:solidFill>
-                          <a:schemeClr val="tx1"/>
-                        </a:solidFill>
-                        <a:latin typeface="Segoe UI" panose="020B0502040204020203" pitchFamily="34" charset="0"/>
-                        <a:ea typeface="+mn-ea"/>
-                        <a:cs typeface="Segoe UI" panose="020B0502040204020203" pitchFamily="34" charset="0"/>
-                      </a:endParaRPr>
                     </a:p>
                   </a:txBody>
                   <a:tcPr marT="45723" marB="45723" anchor="ctr">
@@ -15589,7 +15319,7 @@
                         <a:defRPr/>
                       </a:pPr>
                       <a:r>
-                        <a:rPr lang="en-US" altLang="zh-TW" sz="1200" b="0" baseline="0" dirty="0" smtClean="0">
+                        <a:rPr lang="en-US" altLang="zh-TW" sz="1200" b="0" baseline="0" dirty="0">
                           <a:solidFill>
                             <a:schemeClr val="tx1"/>
                           </a:solidFill>
@@ -15600,15 +15330,6 @@
                         </a:rPr>
                         <a:t>2026/09/14</a:t>
                       </a:r>
-                      <a:endParaRPr lang="en-US" altLang="zh-TW" sz="1200" b="0" baseline="0" dirty="0">
-                        <a:solidFill>
-                          <a:schemeClr val="tx1"/>
-                        </a:solidFill>
-                        <a:latin typeface="Segoe UI" panose="020B0502040204020203" pitchFamily="34" charset="0"/>
-                        <a:ea typeface="+mn-ea"/>
-                        <a:cs typeface="Segoe UI" panose="020B0502040204020203" pitchFamily="34" charset="0"/>
-                        <a:sym typeface="Wingdings" pitchFamily="2" charset="2"/>
-                      </a:endParaRPr>
                     </a:p>
                   </a:txBody>
                   <a:tcPr marT="45723" marB="45723" anchor="ctr">
@@ -15682,7 +15403,7 @@
                         <a:defRPr/>
                       </a:pPr>
                       <a:r>
-                        <a:rPr lang="en-US" altLang="zh-TW" sz="1200" b="0" strike="noStrike" baseline="0" dirty="0" smtClean="0">
+                        <a:rPr lang="en-US" altLang="zh-TW" sz="1200" b="0" strike="noStrike" baseline="0" dirty="0">
                           <a:solidFill>
                             <a:schemeClr val="tx1"/>
                           </a:solidFill>
@@ -15693,92 +15414,6 @@
                         </a:rPr>
                         <a:t>2026/09/14</a:t>
                       </a:r>
-                      <a:endParaRPr lang="en-US" altLang="zh-TW" sz="1200" b="0" strike="noStrike" baseline="0" dirty="0">
-                        <a:solidFill>
-                          <a:schemeClr val="tx1"/>
-                        </a:solidFill>
-                        <a:latin typeface="Segoe UI" panose="020B0502040204020203" pitchFamily="34" charset="0"/>
-                        <a:ea typeface="+mn-ea"/>
-                        <a:cs typeface="Segoe UI" panose="020B0502040204020203" pitchFamily="34" charset="0"/>
-                        <a:sym typeface="Wingdings" pitchFamily="2" charset="2"/>
-                      </a:endParaRPr>
-                    </a:p>
-                  </a:txBody>
-                  <a:tcPr marT="45723" marB="45723" anchor="ctr">
-                    <a:lnL w="3175" cap="flat" cmpd="sng" algn="ctr">
-                      <a:solidFill>
-                        <a:schemeClr val="tx1"/>
-                      </a:solidFill>
-                      <a:prstDash val="solid"/>
-                      <a:round/>
-                      <a:headEnd type="none" w="med" len="med"/>
-                      <a:tailEnd type="none" w="med" len="med"/>
-                    </a:lnL>
-                    <a:lnR w="3175" cap="flat" cmpd="sng" algn="ctr">
-                      <a:solidFill>
-                        <a:schemeClr val="tx1"/>
-                      </a:solidFill>
-                      <a:prstDash val="solid"/>
-                      <a:round/>
-                      <a:headEnd type="none" w="med" len="med"/>
-                      <a:tailEnd type="none" w="med" len="med"/>
-                    </a:lnR>
-                    <a:lnT w="12700" cap="flat" cmpd="sng" algn="ctr">
-                      <a:solidFill>
-                        <a:schemeClr val="tx1"/>
-                      </a:solidFill>
-                      <a:prstDash val="solid"/>
-                      <a:round/>
-                      <a:headEnd type="none" w="med" len="med"/>
-                      <a:tailEnd type="none" w="med" len="med"/>
-                    </a:lnT>
-                    <a:lnB w="12700" cap="flat" cmpd="sng" algn="ctr">
-                      <a:solidFill>
-                        <a:schemeClr val="tx1"/>
-                      </a:solidFill>
-                      <a:prstDash val="solid"/>
-                      <a:round/>
-                      <a:headEnd type="none" w="med" len="med"/>
-                      <a:tailEnd type="none" w="med" len="med"/>
-                    </a:lnB>
-                    <a:lnTlToBr w="12700" cmpd="sng">
-                      <a:noFill/>
-                      <a:prstDash val="solid"/>
-                    </a:lnTlToBr>
-                    <a:lnBlToTr w="12700" cmpd="sng">
-                      <a:noFill/>
-                      <a:prstDash val="solid"/>
-                    </a:lnBlToTr>
-                    <a:noFill/>
-                  </a:tcPr>
-                </a:tc>
-                <a:tc>
-                  <a:txBody>
-                    <a:bodyPr/>
-                    <a:lstStyle/>
-                    <a:p>
-                      <a:pPr marL="171450" marR="0" lvl="0" indent="-171450" algn="l" defTabSz="914400" rtl="0" eaLnBrk="1" fontAlgn="auto" latinLnBrk="0" hangingPunct="1">
-                        <a:lnSpc>
-                          <a:spcPct val="100000"/>
-                        </a:lnSpc>
-                        <a:spcBef>
-                          <a:spcPts val="0"/>
-                        </a:spcBef>
-                        <a:spcAft>
-                          <a:spcPts val="0"/>
-                        </a:spcAft>
-                        <a:buClrTx/>
-                        <a:buSzTx/>
-                        <a:buFont typeface="Arial" pitchFamily="34" charset="0"/>
-                        <a:buChar char="•"/>
-                        <a:tabLst/>
-                        <a:defRPr/>
-                      </a:pPr>
-                      <a:endParaRPr lang="en-US" altLang="zh-TW" sz="1200" dirty="0" smtClean="0">
-                        <a:latin typeface="Segoe UI" panose="020B0502040204020203" pitchFamily="34" charset="0"/>
-                        <a:ea typeface="+mn-ea"/>
-                        <a:cs typeface="Segoe UI" panose="020B0502040204020203" pitchFamily="34" charset="0"/>
-                      </a:endParaRPr>
                     </a:p>
                   </a:txBody>
                   <a:tcPr marT="45723" marB="45723" anchor="ctr">
@@ -15911,19 +15546,96 @@
                     <a:bodyPr/>
                     <a:lstStyle/>
                     <a:p>
+                      <a:pPr marL="171450" marR="0" lvl="0" indent="-171450" algn="l" defTabSz="914400" rtl="0" eaLnBrk="1" fontAlgn="auto" latinLnBrk="0" hangingPunct="1">
+                        <a:lnSpc>
+                          <a:spcPct val="100000"/>
+                        </a:lnSpc>
+                        <a:spcBef>
+                          <a:spcPts val="0"/>
+                        </a:spcBef>
+                        <a:spcAft>
+                          <a:spcPts val="0"/>
+                        </a:spcAft>
+                        <a:buClrTx/>
+                        <a:buSzTx/>
+                        <a:buFont typeface="Arial" pitchFamily="34" charset="0"/>
+                        <a:buChar char="•"/>
+                        <a:tabLst/>
+                        <a:defRPr/>
+                      </a:pPr>
+                      <a:endParaRPr lang="en-US" altLang="zh-TW" sz="1200" dirty="0">
+                        <a:latin typeface="Segoe UI" panose="020B0502040204020203" pitchFamily="34" charset="0"/>
+                        <a:ea typeface="+mn-ea"/>
+                        <a:cs typeface="Segoe UI" panose="020B0502040204020203" pitchFamily="34" charset="0"/>
+                      </a:endParaRPr>
+                    </a:p>
+                  </a:txBody>
+                  <a:tcPr marT="45723" marB="45723" anchor="ctr">
+                    <a:lnL w="3175" cap="flat" cmpd="sng" algn="ctr">
+                      <a:solidFill>
+                        <a:schemeClr val="tx1"/>
+                      </a:solidFill>
+                      <a:prstDash val="solid"/>
+                      <a:round/>
+                      <a:headEnd type="none" w="med" len="med"/>
+                      <a:tailEnd type="none" w="med" len="med"/>
+                    </a:lnL>
+                    <a:lnR w="3175" cap="flat" cmpd="sng" algn="ctr">
+                      <a:solidFill>
+                        <a:schemeClr val="tx1"/>
+                      </a:solidFill>
+                      <a:prstDash val="solid"/>
+                      <a:round/>
+                      <a:headEnd type="none" w="med" len="med"/>
+                      <a:tailEnd type="none" w="med" len="med"/>
+                    </a:lnR>
+                    <a:lnT w="12700" cap="flat" cmpd="sng" algn="ctr">
+                      <a:solidFill>
+                        <a:schemeClr val="tx1"/>
+                      </a:solidFill>
+                      <a:prstDash val="solid"/>
+                      <a:round/>
+                      <a:headEnd type="none" w="med" len="med"/>
+                      <a:tailEnd type="none" w="med" len="med"/>
+                    </a:lnT>
+                    <a:lnB w="12700" cap="flat" cmpd="sng" algn="ctr">
+                      <a:solidFill>
+                        <a:schemeClr val="tx1"/>
+                      </a:solidFill>
+                      <a:prstDash val="solid"/>
+                      <a:round/>
+                      <a:headEnd type="none" w="med" len="med"/>
+                      <a:tailEnd type="none" w="med" len="med"/>
+                    </a:lnB>
+                    <a:lnTlToBr w="12700" cmpd="sng">
+                      <a:noFill/>
+                      <a:prstDash val="solid"/>
+                    </a:lnTlToBr>
+                    <a:lnBlToTr w="12700" cmpd="sng">
+                      <a:noFill/>
+                      <a:prstDash val="solid"/>
+                    </a:lnBlToTr>
+                    <a:noFill/>
+                  </a:tcPr>
+                </a:tc>
+                <a:tc>
+                  <a:txBody>
+                    <a:bodyPr/>
+                    <a:lstStyle/>
+                    <a:p>
                       <a:pPr marL="171450" indent="-171450" algn="l">
                         <a:buFont typeface="Arial" pitchFamily="34" charset="0"/>
                         <a:buChar char="•"/>
                       </a:pPr>
                       <a:r>
-                        <a:rPr lang="zh-TW" altLang="en-US" sz="1200" dirty="0" smtClean="0">
+                        <a:rPr lang="zh-TW" altLang="en-US" sz="1200" dirty="0">
                           <a:latin typeface="Segoe UI" panose="020B0502040204020203" pitchFamily="34" charset="0"/>
                           <a:ea typeface="+mn-ea"/>
                           <a:cs typeface="Segoe UI" panose="020B0502040204020203" pitchFamily="34" charset="0"/>
                         </a:rPr>
                         <a:t>已重設完成。</a:t>
                       </a:r>
-                      <a:endParaRPr lang="en-US" altLang="zh-TW" sz="1200" dirty="0" smtClean="0">
+                      <a:endParaRPr lang="en-US" altLang="zh-TW" sz="1200" dirty="0">
                         <a:latin typeface="Segoe UI" panose="020B0502040204020203" pitchFamily="34" charset="0"/>
                         <a:ea typeface="+mn-ea"/>
                         <a:cs typeface="Segoe UI" panose="020B0502040204020203" pitchFamily="34" charset="0"/>
@@ -15935,18 +15647,13 @@
                         <a:buChar char="•"/>
                       </a:pPr>
                       <a:r>
-                        <a:rPr lang="zh-TW" altLang="en-US" sz="1200" dirty="0" smtClean="0">
+                        <a:rPr lang="zh-TW" altLang="en-US" sz="1200" dirty="0">
                           <a:latin typeface="Segoe UI" panose="020B0502040204020203" pitchFamily="34" charset="0"/>
                           <a:ea typeface="+mn-ea"/>
                           <a:cs typeface="Segoe UI" panose="020B0502040204020203" pitchFamily="34" charset="0"/>
                         </a:rPr>
                         <a:t>待馬達實際上機時，再確定機械原點位置。</a:t>
                       </a:r>
-                      <a:endParaRPr lang="zh-TW" altLang="en-US" sz="1200" dirty="0">
-                        <a:latin typeface="Segoe UI" panose="020B0502040204020203" pitchFamily="34" charset="0"/>
-                        <a:ea typeface="+mn-ea"/>
-                        <a:cs typeface="Segoe UI" panose="020B0502040204020203" pitchFamily="34" charset="0"/>
-                      </a:endParaRPr>
                     </a:p>
                   </a:txBody>
                   <a:tcPr marT="45723" marB="45723" anchor="ctr">
@@ -15999,7 +15706,7 @@
                 </a:tc>
                 <a:extLst>
                   <a:ext uri="{0D108BD9-81ED-4DB2-BD59-A6C34878D82A}">
-                    <a16:rowId xmlns:a16="http://schemas.microsoft.com/office/drawing/2014/main" xmlns="" val="10001"/>
+                    <a16:rowId xmlns:a16="http://schemas.microsoft.com/office/drawing/2014/main" val="10001"/>
                   </a:ext>
                 </a:extLst>
               </a:tr>
@@ -16614,7 +16321,7 @@
                 </a:tc>
                 <a:extLst>
                   <a:ext uri="{0D108BD9-81ED-4DB2-BD59-A6C34878D82A}">
-                    <a16:rowId xmlns:a16="http://schemas.microsoft.com/office/drawing/2014/main" xmlns="" val="10002"/>
+                    <a16:rowId xmlns:a16="http://schemas.microsoft.com/office/drawing/2014/main" val="10002"/>
                   </a:ext>
                 </a:extLst>
               </a:tr>
@@ -17027,7 +16734,7 @@
                         <a:tabLst/>
                         <a:defRPr/>
                       </a:pPr>
-                      <a:endParaRPr lang="en-US" altLang="zh-TW" sz="1200" dirty="0" smtClean="0">
+                      <a:endParaRPr lang="en-US" altLang="zh-TW" sz="1200" dirty="0">
                         <a:latin typeface="Segoe UI" panose="020B0502040204020203" pitchFamily="34" charset="0"/>
                         <a:ea typeface="+mn-ea"/>
                         <a:cs typeface="Segoe UI" panose="020B0502040204020203" pitchFamily="34" charset="0"/>
@@ -17225,7 +16932,7 @@
                 </a:tc>
                 <a:extLst>
                   <a:ext uri="{0D108BD9-81ED-4DB2-BD59-A6C34878D82A}">
-                    <a16:rowId xmlns:a16="http://schemas.microsoft.com/office/drawing/2014/main" xmlns="" val="10003"/>
+                    <a16:rowId xmlns:a16="http://schemas.microsoft.com/office/drawing/2014/main" val="10003"/>
                   </a:ext>
                 </a:extLst>
               </a:tr>
@@ -17253,7 +16960,6 @@
             <a:headEnd type="none" w="med" len="med"/>
             <a:tailEnd type="none" w="med" len="med"/>
           </a:ln>
-          <a:extLst/>
         </p:spPr>
         <p:style>
           <a:lnRef idx="1">
@@ -17293,7 +16999,7 @@
               <a:buNone/>
               <a:tabLst/>
             </a:pPr>
-            <a:endParaRPr kumimoji="1" lang="zh-TW" altLang="en-US" sz="2800" b="1" i="0" u="none" strike="noStrike" cap="none" normalizeH="0" baseline="0" smtClean="0">
+            <a:endParaRPr kumimoji="1" lang="zh-TW" altLang="en-US" sz="2800" b="1" i="0" u="none" strike="noStrike" cap="none" normalizeH="0" baseline="0">
               <a:ln>
                 <a:noFill/>
               </a:ln>
@@ -17460,21 +17166,8 @@
                 <a:ea typeface="標楷體" pitchFamily="65" charset="-120"/>
                 <a:cs typeface="Times New Roman" pitchFamily="18" charset="0"/>
               </a:rPr>
-              <a:t>二</a:t>
+              <a:t>二、工作列表</a:t>
             </a:r>
-            <a:r>
-              <a:rPr lang="zh-TW" altLang="en-US" sz="2000" dirty="0" smtClean="0">
-                <a:latin typeface="Times New Roman" pitchFamily="18" charset="0"/>
-                <a:ea typeface="標楷體" pitchFamily="65" charset="-120"/>
-                <a:cs typeface="Times New Roman" pitchFamily="18" charset="0"/>
-              </a:rPr>
-              <a:t>、工作列表</a:t>
-            </a:r>
-            <a:endParaRPr lang="zh-TW" altLang="en-US" sz="2000" dirty="0">
-              <a:latin typeface="Times New Roman" pitchFamily="18" charset="0"/>
-              <a:ea typeface="標楷體" pitchFamily="65" charset="-120"/>
-              <a:cs typeface="Times New Roman" pitchFamily="18" charset="0"/>
-            </a:endParaRPr>
           </a:p>
         </p:txBody>
       </p:sp>
@@ -17488,13 +17181,6 @@
   <p:clrMapOvr>
     <a:masterClrMapping/>
   </p:clrMapOvr>
-  <p:timing>
-    <p:tnLst>
-      <p:par>
-        <p:cTn id="1" dur="indefinite" restart="never" nodeType="tmRoot"/>
-      </p:par>
-    </p:tnLst>
-  </p:timing>
 </p:sld>
 </file>
 
@@ -17789,13 +17475,6 @@
   <p:clrMapOvr>
     <a:masterClrMapping/>
   </p:clrMapOvr>
-  <p:timing>
-    <p:tnLst>
-      <p:par>
-        <p:cTn id="1" dur="indefinite" restart="never" nodeType="tmRoot"/>
-      </p:par>
-    </p:tnLst>
-  </p:timing>
 </p:sld>
 </file>
 
@@ -17821,7 +17500,7 @@
           <p:cNvPr id="5" name="文字方塊 4">
             <a:extLst>
               <a:ext uri="{FF2B5EF4-FFF2-40B4-BE49-F238E27FC236}">
-                <a16:creationId xmlns="" xmlns:a16="http://schemas.microsoft.com/office/drawing/2014/main" id="{2D4D2B73-B008-B5AD-CC0D-F1827BE7F03A}"/>
+                <a16:creationId xmlns:a16="http://schemas.microsoft.com/office/drawing/2014/main" id="{2D4D2B73-B008-B5AD-CC0D-F1827BE7F03A}"/>
               </a:ext>
             </a:extLst>
           </p:cNvPr>
@@ -17876,7 +17555,7 @@
           <p:cNvPr id="10" name="圖片 9">
             <a:extLst>
               <a:ext uri="{FF2B5EF4-FFF2-40B4-BE49-F238E27FC236}">
-                <a16:creationId xmlns="" xmlns:a16="http://schemas.microsoft.com/office/drawing/2014/main" id="{C0132EF5-27F5-74E3-91E2-720C37277CB2}"/>
+                <a16:creationId xmlns:a16="http://schemas.microsoft.com/office/drawing/2014/main" id="{C0132EF5-27F5-74E3-91E2-720C37277CB2}"/>
               </a:ext>
             </a:extLst>
           </p:cNvPr>
@@ -17906,7 +17585,7 @@
           <p:cNvPr id="11" name="文字方塊 10">
             <a:extLst>
               <a:ext uri="{FF2B5EF4-FFF2-40B4-BE49-F238E27FC236}">
-                <a16:creationId xmlns="" xmlns:a16="http://schemas.microsoft.com/office/drawing/2014/main" id="{16B5708E-F432-0089-C98C-ADBC5C37E6EF}"/>
+                <a16:creationId xmlns:a16="http://schemas.microsoft.com/office/drawing/2014/main" id="{16B5708E-F432-0089-C98C-ADBC5C37E6EF}"/>
               </a:ext>
             </a:extLst>
           </p:cNvPr>
@@ -17961,6 +17640,415 @@
           </a:p>
         </p:txBody>
       </p:sp>
+      <p:sp>
+        <p:nvSpPr>
+          <p:cNvPr id="3" name="Text Placeholder 3">
+            <a:extLst>
+              <a:ext uri="{FF2B5EF4-FFF2-40B4-BE49-F238E27FC236}">
+                <a16:creationId xmlns:a16="http://schemas.microsoft.com/office/drawing/2014/main" id="{345EDE16-35A0-1B34-645A-ED267DE94F30}"/>
+              </a:ext>
+            </a:extLst>
+          </p:cNvPr>
+          <p:cNvSpPr txBox="1">
+            <a:spLocks/>
+          </p:cNvSpPr>
+          <p:nvPr/>
+        </p:nvSpPr>
+        <p:spPr>
+          <a:xfrm>
+            <a:off x="381000" y="1066800"/>
+            <a:ext cx="3733800" cy="5029200"/>
+          </a:xfrm>
+          <a:prstGeom prst="rect">
+            <a:avLst/>
+          </a:prstGeom>
+        </p:spPr>
+        <p:txBody>
+          <a:bodyPr/>
+          <a:lstStyle>
+            <a:lvl1pPr marL="342900" indent="-342900" algn="l" rtl="0" eaLnBrk="0" fontAlgn="base" hangingPunct="0">
+              <a:spcBef>
+                <a:spcPct val="20000"/>
+              </a:spcBef>
+              <a:spcAft>
+                <a:spcPct val="0"/>
+              </a:spcAft>
+              <a:buClr>
+                <a:schemeClr val="bg2"/>
+              </a:buClr>
+              <a:buSzPct val="75000"/>
+              <a:buFont typeface="Wingdings" pitchFamily="2" charset="2"/>
+              <a:buChar char="n"/>
+              <a:defRPr kumimoji="1" sz="2400">
+                <a:solidFill>
+                  <a:schemeClr val="tx1"/>
+                </a:solidFill>
+                <a:latin typeface="+mn-lt"/>
+                <a:ea typeface="+mn-ea"/>
+                <a:cs typeface="+mn-cs"/>
+              </a:defRPr>
+            </a:lvl1pPr>
+            <a:lvl2pPr marL="742950" indent="-285750" algn="l" rtl="0" eaLnBrk="0" fontAlgn="base" hangingPunct="0">
+              <a:spcBef>
+                <a:spcPct val="20000"/>
+              </a:spcBef>
+              <a:spcAft>
+                <a:spcPct val="0"/>
+              </a:spcAft>
+              <a:buClr>
+                <a:schemeClr val="accent2"/>
+              </a:buClr>
+              <a:buSzPct val="80000"/>
+              <a:buFont typeface="Wingdings" pitchFamily="2" charset="2"/>
+              <a:buChar char="¨"/>
+              <a:defRPr kumimoji="1" sz="2800">
+                <a:solidFill>
+                  <a:schemeClr val="tx1"/>
+                </a:solidFill>
+                <a:latin typeface="+mn-lt"/>
+                <a:ea typeface="新細明體" charset="-120"/>
+              </a:defRPr>
+            </a:lvl2pPr>
+            <a:lvl3pPr marL="1143000" indent="-228600" algn="l" rtl="0" eaLnBrk="0" fontAlgn="base" hangingPunct="0">
+              <a:spcBef>
+                <a:spcPct val="20000"/>
+              </a:spcBef>
+              <a:spcAft>
+                <a:spcPct val="0"/>
+              </a:spcAft>
+              <a:buClr>
+                <a:schemeClr val="bg2"/>
+              </a:buClr>
+              <a:buSzPct val="65000"/>
+              <a:buFont typeface="Wingdings" pitchFamily="2" charset="2"/>
+              <a:buChar char="n"/>
+              <a:defRPr kumimoji="1" sz="2400">
+                <a:solidFill>
+                  <a:schemeClr val="tx1"/>
+                </a:solidFill>
+                <a:latin typeface="+mn-lt"/>
+                <a:ea typeface="新細明體" charset="-120"/>
+              </a:defRPr>
+            </a:lvl3pPr>
+            <a:lvl4pPr marL="1600200" indent="-228600" algn="l" rtl="0" eaLnBrk="0" fontAlgn="base" hangingPunct="0">
+              <a:spcBef>
+                <a:spcPct val="20000"/>
+              </a:spcBef>
+              <a:spcAft>
+                <a:spcPct val="0"/>
+              </a:spcAft>
+              <a:buClr>
+                <a:schemeClr val="accent2"/>
+              </a:buClr>
+              <a:buSzPct val="70000"/>
+              <a:buFont typeface="Wingdings" pitchFamily="2" charset="2"/>
+              <a:buChar char="¨"/>
+              <a:defRPr kumimoji="1" sz="2000">
+                <a:solidFill>
+                  <a:schemeClr val="tx1"/>
+                </a:solidFill>
+                <a:latin typeface="+mn-lt"/>
+                <a:ea typeface="新細明體" charset="-120"/>
+              </a:defRPr>
+            </a:lvl4pPr>
+            <a:lvl5pPr marL="2057400" indent="-228600" algn="l" rtl="0" eaLnBrk="0" fontAlgn="base" hangingPunct="0">
+              <a:spcBef>
+                <a:spcPct val="20000"/>
+              </a:spcBef>
+              <a:spcAft>
+                <a:spcPct val="0"/>
+              </a:spcAft>
+              <a:buClr>
+                <a:schemeClr val="bg2"/>
+              </a:buClr>
+              <a:buFont typeface="Wingdings" pitchFamily="2" charset="2"/>
+              <a:buChar char="§"/>
+              <a:defRPr kumimoji="1" sz="2000">
+                <a:solidFill>
+                  <a:schemeClr val="tx1"/>
+                </a:solidFill>
+                <a:latin typeface="+mn-lt"/>
+                <a:ea typeface="新細明體" charset="-120"/>
+              </a:defRPr>
+            </a:lvl5pPr>
+            <a:lvl6pPr marL="2514600" indent="-228600" algn="l" rtl="0" fontAlgn="base">
+              <a:spcBef>
+                <a:spcPct val="20000"/>
+              </a:spcBef>
+              <a:spcAft>
+                <a:spcPct val="0"/>
+              </a:spcAft>
+              <a:buClr>
+                <a:schemeClr val="bg2"/>
+              </a:buClr>
+              <a:buFont typeface="Wingdings" pitchFamily="2" charset="2"/>
+              <a:buChar char="§"/>
+              <a:defRPr kumimoji="1" sz="2000">
+                <a:solidFill>
+                  <a:schemeClr val="tx1"/>
+                </a:solidFill>
+                <a:latin typeface="+mn-lt"/>
+                <a:ea typeface="新細明體" charset="-120"/>
+              </a:defRPr>
+            </a:lvl6pPr>
+            <a:lvl7pPr marL="2971800" indent="-228600" algn="l" rtl="0" fontAlgn="base">
+              <a:spcBef>
+                <a:spcPct val="20000"/>
+              </a:spcBef>
+              <a:spcAft>
+                <a:spcPct val="0"/>
+              </a:spcAft>
+              <a:buClr>
+                <a:schemeClr val="bg2"/>
+              </a:buClr>
+              <a:buFont typeface="Wingdings" pitchFamily="2" charset="2"/>
+              <a:buChar char="§"/>
+              <a:defRPr kumimoji="1" sz="2000">
+                <a:solidFill>
+                  <a:schemeClr val="tx1"/>
+                </a:solidFill>
+                <a:latin typeface="+mn-lt"/>
+                <a:ea typeface="新細明體" charset="-120"/>
+              </a:defRPr>
+            </a:lvl7pPr>
+            <a:lvl8pPr marL="3429000" indent="-228600" algn="l" rtl="0" fontAlgn="base">
+              <a:spcBef>
+                <a:spcPct val="20000"/>
+              </a:spcBef>
+              <a:spcAft>
+                <a:spcPct val="0"/>
+              </a:spcAft>
+              <a:buClr>
+                <a:schemeClr val="bg2"/>
+              </a:buClr>
+              <a:buFont typeface="Wingdings" pitchFamily="2" charset="2"/>
+              <a:buChar char="§"/>
+              <a:defRPr kumimoji="1" sz="2000">
+                <a:solidFill>
+                  <a:schemeClr val="tx1"/>
+                </a:solidFill>
+                <a:latin typeface="+mn-lt"/>
+                <a:ea typeface="新細明體" charset="-120"/>
+              </a:defRPr>
+            </a:lvl8pPr>
+            <a:lvl9pPr marL="3886200" indent="-228600" algn="l" rtl="0" fontAlgn="base">
+              <a:spcBef>
+                <a:spcPct val="20000"/>
+              </a:spcBef>
+              <a:spcAft>
+                <a:spcPct val="0"/>
+              </a:spcAft>
+              <a:buClr>
+                <a:schemeClr val="bg2"/>
+              </a:buClr>
+              <a:buFont typeface="Wingdings" pitchFamily="2" charset="2"/>
+              <a:buChar char="§"/>
+              <a:defRPr kumimoji="1" sz="2000">
+                <a:solidFill>
+                  <a:schemeClr val="tx1"/>
+                </a:solidFill>
+                <a:latin typeface="+mn-lt"/>
+                <a:ea typeface="新細明體" charset="-120"/>
+              </a:defRPr>
+            </a:lvl9pPr>
+          </a:lstStyle>
+          <a:p>
+            <a:pPr>
+              <a:lnSpc>
+                <a:spcPts val="3000"/>
+              </a:lnSpc>
+              <a:buClrTx/>
+              <a:buFont typeface="Wingdings" panose="05000000000000000000" pitchFamily="2" charset="2"/>
+              <a:buChar char="Ø"/>
+            </a:pPr>
+            <a:r>
+              <a:rPr lang="zh-TW" altLang="en-US" sz="2000" b="0" kern="0" dirty="0">
+                <a:latin typeface="Segoe UI" panose="020B0502040204020203" pitchFamily="34" charset="0"/>
+                <a:cs typeface="Segoe UI" panose="020B0502040204020203" pitchFamily="34" charset="0"/>
+              </a:rPr>
+              <a:t>兩種介面：</a:t>
+            </a:r>
+            <a:br>
+              <a:rPr lang="en-US" altLang="zh-TW" sz="2000" b="0" kern="0" dirty="0">
+                <a:latin typeface="Segoe UI" panose="020B0502040204020203" pitchFamily="34" charset="0"/>
+                <a:cs typeface="Segoe UI" panose="020B0502040204020203" pitchFamily="34" charset="0"/>
+              </a:rPr>
+            </a:br>
+            <a:r>
+              <a:rPr lang="en-US" altLang="zh-TW" sz="2000" b="0" kern="0" dirty="0">
+                <a:latin typeface="Segoe UI" panose="020B0502040204020203" pitchFamily="34" charset="0"/>
+                <a:cs typeface="Segoe UI" panose="020B0502040204020203" pitchFamily="34" charset="0"/>
+              </a:rPr>
+              <a:t>1. USB-ITN</a:t>
+            </a:r>
+            <a:r>
+              <a:rPr lang="zh-TW" altLang="en-US" sz="2000" b="0" kern="0" dirty="0">
+                <a:latin typeface="Segoe UI" panose="020B0502040204020203" pitchFamily="34" charset="0"/>
+                <a:cs typeface="Segoe UI" panose="020B0502040204020203" pitchFamily="34" charset="0"/>
+              </a:rPr>
+              <a:t>。</a:t>
+            </a:r>
+            <a:br>
+              <a:rPr lang="en-US" altLang="zh-TW" sz="2000" b="0" kern="0" dirty="0">
+                <a:latin typeface="Segoe UI" panose="020B0502040204020203" pitchFamily="34" charset="0"/>
+                <a:cs typeface="Segoe UI" panose="020B0502040204020203" pitchFamily="34" charset="0"/>
+              </a:rPr>
+            </a:br>
+            <a:r>
+              <a:rPr lang="en-US" altLang="zh-TW" sz="2000" b="0" kern="0" dirty="0">
+                <a:latin typeface="Segoe UI" panose="020B0502040204020203" pitchFamily="34" charset="0"/>
+                <a:cs typeface="Segoe UI" panose="020B0502040204020203" pitchFamily="34" charset="0"/>
+              </a:rPr>
+              <a:t>2. RS-232C</a:t>
+            </a:r>
+            <a:r>
+              <a:rPr lang="zh-TW" altLang="en-US" sz="2000" b="0" kern="0" dirty="0">
+                <a:latin typeface="Segoe UI" panose="020B0502040204020203" pitchFamily="34" charset="0"/>
+                <a:cs typeface="Segoe UI" panose="020B0502040204020203" pitchFamily="34" charset="0"/>
+              </a:rPr>
+              <a:t>。</a:t>
+            </a:r>
+            <a:endParaRPr lang="en-US" altLang="zh-TW" sz="2000" b="0" kern="0" dirty="0">
+              <a:latin typeface="Segoe UI" panose="020B0502040204020203" pitchFamily="34" charset="0"/>
+              <a:cs typeface="Segoe UI" panose="020B0502040204020203" pitchFamily="34" charset="0"/>
+            </a:endParaRPr>
+          </a:p>
+          <a:p>
+            <a:pPr>
+              <a:lnSpc>
+                <a:spcPts val="3000"/>
+              </a:lnSpc>
+              <a:buClrTx/>
+              <a:buFont typeface="Wingdings" panose="05000000000000000000" pitchFamily="2" charset="2"/>
+              <a:buChar char="Ø"/>
+            </a:pPr>
+            <a:r>
+              <a:rPr lang="en-US" altLang="zh-TW" sz="2000" b="0" kern="0" dirty="0">
+                <a:latin typeface="Segoe UI" panose="020B0502040204020203" pitchFamily="34" charset="0"/>
+                <a:cs typeface="Segoe UI" panose="020B0502040204020203" pitchFamily="34" charset="0"/>
+              </a:rPr>
+              <a:t>USB-ITN</a:t>
+            </a:r>
+            <a:r>
+              <a:rPr lang="zh-TW" altLang="en-US" sz="2000" b="0" kern="0" dirty="0">
+                <a:latin typeface="Segoe UI" panose="020B0502040204020203" pitchFamily="34" charset="0"/>
+                <a:cs typeface="Segoe UI" panose="020B0502040204020203" pitchFamily="34" charset="0"/>
+              </a:rPr>
+              <a:t>兩種輸入方式：</a:t>
+            </a:r>
+            <a:br>
+              <a:rPr lang="en-US" altLang="zh-TW" sz="2000" b="0" kern="0" dirty="0">
+                <a:latin typeface="Segoe UI" panose="020B0502040204020203" pitchFamily="34" charset="0"/>
+                <a:cs typeface="Segoe UI" panose="020B0502040204020203" pitchFamily="34" charset="0"/>
+              </a:rPr>
+            </a:br>
+            <a:r>
+              <a:rPr lang="en-US" altLang="zh-TW" sz="2000" b="0" kern="0" dirty="0">
+                <a:latin typeface="Segoe UI" panose="020B0502040204020203" pitchFamily="34" charset="0"/>
+                <a:cs typeface="Segoe UI" panose="020B0502040204020203" pitchFamily="34" charset="0"/>
+              </a:rPr>
+              <a:t>1. HID</a:t>
+            </a:r>
+            <a:r>
+              <a:rPr lang="zh-TW" altLang="en-US" sz="2000" b="0" kern="0" dirty="0">
+                <a:latin typeface="Segoe UI" panose="020B0502040204020203" pitchFamily="34" charset="0"/>
+                <a:cs typeface="Segoe UI" panose="020B0502040204020203" pitchFamily="34" charset="0"/>
+              </a:rPr>
+              <a:t>。</a:t>
+            </a:r>
+            <a:br>
+              <a:rPr lang="en-US" altLang="zh-TW" sz="2000" b="0" kern="0" dirty="0">
+                <a:latin typeface="Segoe UI" panose="020B0502040204020203" pitchFamily="34" charset="0"/>
+                <a:cs typeface="Segoe UI" panose="020B0502040204020203" pitchFamily="34" charset="0"/>
+              </a:rPr>
+            </a:br>
+            <a:r>
+              <a:rPr lang="en-US" altLang="zh-TW" sz="2000" b="0" kern="0" dirty="0">
+                <a:latin typeface="Segoe UI" panose="020B0502040204020203" pitchFamily="34" charset="0"/>
+                <a:cs typeface="Segoe UI" panose="020B0502040204020203" pitchFamily="34" charset="0"/>
+              </a:rPr>
+              <a:t>2. VCP (</a:t>
+            </a:r>
+            <a:r>
+              <a:rPr lang="zh-TW" altLang="en-US" sz="2000" b="0" kern="0" dirty="0">
+                <a:latin typeface="Segoe UI" panose="020B0502040204020203" pitchFamily="34" charset="0"/>
+                <a:cs typeface="Segoe UI" panose="020B0502040204020203" pitchFamily="34" charset="0"/>
+              </a:rPr>
+              <a:t>虛擬</a:t>
+            </a:r>
+            <a:r>
+              <a:rPr lang="en-US" altLang="zh-TW" sz="2000" b="0" kern="0" dirty="0">
+                <a:latin typeface="Segoe UI" panose="020B0502040204020203" pitchFamily="34" charset="0"/>
+                <a:cs typeface="Segoe UI" panose="020B0502040204020203" pitchFamily="34" charset="0"/>
+              </a:rPr>
+              <a:t>COM</a:t>
+            </a:r>
+            <a:r>
+              <a:rPr lang="zh-TW" altLang="en-US" sz="2000" b="0" kern="0" dirty="0">
+                <a:latin typeface="Segoe UI" panose="020B0502040204020203" pitchFamily="34" charset="0"/>
+                <a:cs typeface="Segoe UI" panose="020B0502040204020203" pitchFamily="34" charset="0"/>
+              </a:rPr>
+              <a:t>埠</a:t>
+            </a:r>
+            <a:r>
+              <a:rPr lang="en-US" altLang="zh-TW" sz="2000" b="0" kern="0" dirty="0">
+                <a:latin typeface="Segoe UI" panose="020B0502040204020203" pitchFamily="34" charset="0"/>
+                <a:cs typeface="Segoe UI" panose="020B0502040204020203" pitchFamily="34" charset="0"/>
+              </a:rPr>
+              <a:t>)</a:t>
+            </a:r>
+            <a:r>
+              <a:rPr lang="zh-TW" altLang="en-US" sz="2000" b="0" kern="0" dirty="0">
+                <a:latin typeface="Segoe UI" panose="020B0502040204020203" pitchFamily="34" charset="0"/>
+                <a:cs typeface="Segoe UI" panose="020B0502040204020203" pitchFamily="34" charset="0"/>
+              </a:rPr>
+              <a:t>。</a:t>
+            </a:r>
+            <a:br>
+              <a:rPr lang="en-US" altLang="zh-TW" sz="2000" b="0" kern="0" dirty="0">
+                <a:latin typeface="Segoe UI" panose="020B0502040204020203" pitchFamily="34" charset="0"/>
+                <a:cs typeface="Segoe UI" panose="020B0502040204020203" pitchFamily="34" charset="0"/>
+              </a:rPr>
+            </a:br>
+            <a:r>
+              <a:rPr lang="en-US" altLang="zh-TW" sz="2000" b="0" kern="0" dirty="0">
+                <a:latin typeface="Segoe UI" panose="020B0502040204020203" pitchFamily="34" charset="0"/>
+                <a:cs typeface="Segoe UI" panose="020B0502040204020203" pitchFamily="34" charset="0"/>
+              </a:rPr>
+              <a:t>   (</a:t>
+            </a:r>
+            <a:r>
+              <a:rPr lang="zh-TW" altLang="en-US" sz="2000" b="0" kern="0" dirty="0">
+                <a:latin typeface="Segoe UI" panose="020B0502040204020203" pitchFamily="34" charset="0"/>
+                <a:cs typeface="Segoe UI" panose="020B0502040204020203" pitchFamily="34" charset="0"/>
+              </a:rPr>
+              <a:t>需要安裝驅動程式</a:t>
+            </a:r>
+            <a:r>
+              <a:rPr lang="en-US" altLang="zh-TW" sz="2000" b="0" kern="0" dirty="0">
+                <a:latin typeface="Segoe UI" panose="020B0502040204020203" pitchFamily="34" charset="0"/>
+                <a:cs typeface="Segoe UI" panose="020B0502040204020203" pitchFamily="34" charset="0"/>
+              </a:rPr>
+              <a:t>)</a:t>
+            </a:r>
+          </a:p>
+          <a:p>
+            <a:pPr>
+              <a:lnSpc>
+                <a:spcPts val="3000"/>
+              </a:lnSpc>
+              <a:buClrTx/>
+              <a:buFont typeface="Wingdings" panose="05000000000000000000" pitchFamily="2" charset="2"/>
+              <a:buChar char="Ø"/>
+            </a:pPr>
+            <a:endParaRPr lang="zh-TW" altLang="zh-TW" sz="2000" b="0" dirty="0">
+              <a:latin typeface="+mn-ea"/>
+              <a:ea typeface="+mn-ea"/>
+              <a:cs typeface="Calibri" panose="020F0502020204030204" pitchFamily="34" charset="0"/>
+            </a:endParaRPr>
+          </a:p>
+        </p:txBody>
+      </p:sp>
     </p:spTree>
     <p:extLst>
       <p:ext uri="{BB962C8B-B14F-4D97-AF65-F5344CB8AC3E}">
@@ -17982,7 +18070,7 @@
         <p:cNvPr id="1" name="">
           <a:extLst>
             <a:ext uri="{FF2B5EF4-FFF2-40B4-BE49-F238E27FC236}">
-              <a16:creationId xmlns="" xmlns:a16="http://schemas.microsoft.com/office/drawing/2014/main" id="{A1D20F4C-2A3A-C32C-2970-E2A5C43A61B1}"/>
+              <a16:creationId xmlns:a16="http://schemas.microsoft.com/office/drawing/2014/main" id="{A1D20F4C-2A3A-C32C-2970-E2A5C43A61B1}"/>
             </a:ext>
           </a:extLst>
         </p:cNvPr>
@@ -18002,7 +18090,7 @@
           <p:cNvPr id="5" name="文字方塊 4">
             <a:extLst>
               <a:ext uri="{FF2B5EF4-FFF2-40B4-BE49-F238E27FC236}">
-                <a16:creationId xmlns="" xmlns:a16="http://schemas.microsoft.com/office/drawing/2014/main" id="{85C3D193-4FEA-8A92-03A2-12886F0B3F6B}"/>
+                <a16:creationId xmlns:a16="http://schemas.microsoft.com/office/drawing/2014/main" id="{85C3D193-4FEA-8A92-03A2-12886F0B3F6B}"/>
               </a:ext>
             </a:extLst>
           </p:cNvPr>
@@ -18041,7 +18129,7 @@
           <p:cNvPr id="6" name="Text Placeholder 3">
             <a:extLst>
               <a:ext uri="{FF2B5EF4-FFF2-40B4-BE49-F238E27FC236}">
-                <a16:creationId xmlns="" xmlns:a16="http://schemas.microsoft.com/office/drawing/2014/main" id="{EE356882-EF0E-BF07-6006-203163BE0A01}"/>
+                <a16:creationId xmlns:a16="http://schemas.microsoft.com/office/drawing/2014/main" id="{EE356882-EF0E-BF07-6006-203163BE0A01}"/>
               </a:ext>
             </a:extLst>
           </p:cNvPr>
@@ -18481,7 +18569,7 @@
         <p:cNvPr id="1" name="">
           <a:extLst>
             <a:ext uri="{FF2B5EF4-FFF2-40B4-BE49-F238E27FC236}">
-              <a16:creationId xmlns="" xmlns:a16="http://schemas.microsoft.com/office/drawing/2014/main" id="{02E914DD-785C-1FEB-25DB-C642D10F0B53}"/>
+              <a16:creationId xmlns:a16="http://schemas.microsoft.com/office/drawing/2014/main" id="{02E914DD-785C-1FEB-25DB-C642D10F0B53}"/>
             </a:ext>
           </a:extLst>
         </p:cNvPr>
@@ -18501,7 +18589,7 @@
           <p:cNvPr id="5" name="文字方塊 4">
             <a:extLst>
               <a:ext uri="{FF2B5EF4-FFF2-40B4-BE49-F238E27FC236}">
-                <a16:creationId xmlns="" xmlns:a16="http://schemas.microsoft.com/office/drawing/2014/main" id="{733A4835-4400-8161-9F80-8884D0C4CE87}"/>
+                <a16:creationId xmlns:a16="http://schemas.microsoft.com/office/drawing/2014/main" id="{733A4835-4400-8161-9F80-8884D0C4CE87}"/>
               </a:ext>
             </a:extLst>
           </p:cNvPr>
@@ -18553,7 +18641,7 @@
           <p:cNvPr id="6" name="Text Placeholder 3">
             <a:extLst>
               <a:ext uri="{FF2B5EF4-FFF2-40B4-BE49-F238E27FC236}">
-                <a16:creationId xmlns="" xmlns:a16="http://schemas.microsoft.com/office/drawing/2014/main" id="{112FCCF9-1205-AA37-E282-E387FA7BBBCA}"/>
+                <a16:creationId xmlns:a16="http://schemas.microsoft.com/office/drawing/2014/main" id="{112FCCF9-1205-AA37-E282-E387FA7BBBCA}"/>
               </a:ext>
             </a:extLst>
           </p:cNvPr>
@@ -18814,7 +18902,7 @@
               <a:buChar char="l"/>
             </a:pPr>
             <a:r>
-              <a:rPr lang="zh-TW" altLang="en-US" sz="2000" b="0" kern="0" dirty="0" smtClean="0">
+              <a:rPr lang="zh-TW" altLang="en-US" sz="2000" b="0" kern="0" dirty="0">
                 <a:latin typeface="+mn-ea"/>
                 <a:ea typeface="+mn-ea"/>
                 <a:cs typeface="Segoe UI" panose="020B0502040204020203" pitchFamily="34" charset="0"/>
@@ -19007,7 +19095,7 @@
           <p:cNvPr id="5" name="文字方塊 4">
             <a:extLst>
               <a:ext uri="{FF2B5EF4-FFF2-40B4-BE49-F238E27FC236}">
-                <a16:creationId xmlns:a16="http://schemas.microsoft.com/office/drawing/2014/main" xmlns="" id="{2D4D2B73-B008-B5AD-CC0D-F1827BE7F03A}"/>
+                <a16:creationId xmlns:a16="http://schemas.microsoft.com/office/drawing/2014/main" id="{2D4D2B73-B008-B5AD-CC0D-F1827BE7F03A}"/>
               </a:ext>
             </a:extLst>
           </p:cNvPr>
@@ -19039,7 +19127,7 @@
               <a:t>※ </a:t>
             </a:r>
             <a:r>
-              <a:rPr lang="zh-TW" altLang="en-US" sz="2400" dirty="0" smtClean="0">
+              <a:rPr lang="zh-TW" altLang="en-US" sz="2400" dirty="0">
                 <a:latin typeface="Times New Roman" pitchFamily="18" charset="0"/>
                 <a:ea typeface="標楷體" pitchFamily="65" charset="-120"/>
                 <a:cs typeface="Times New Roman" pitchFamily="18" charset="0"/>
@@ -19047,7 +19135,7 @@
               <a:t>區北廠 </a:t>
             </a:r>
             <a:r>
-              <a:rPr lang="en-US" altLang="zh-TW" sz="2400" dirty="0" smtClean="0">
+              <a:rPr lang="en-US" altLang="zh-TW" sz="2400" dirty="0">
                 <a:latin typeface="Times New Roman" pitchFamily="18" charset="0"/>
                 <a:ea typeface="標楷體" pitchFamily="65" charset="-120"/>
                 <a:cs typeface="Times New Roman" pitchFamily="18" charset="0"/>
@@ -19055,7 +19143,7 @@
               <a:t>- </a:t>
             </a:r>
             <a:r>
-              <a:rPr lang="zh-TW" altLang="en-US" sz="2400" dirty="0" smtClean="0">
+              <a:rPr lang="zh-TW" altLang="en-US" sz="2400" dirty="0">
                 <a:latin typeface="Times New Roman" pitchFamily="18" charset="0"/>
                 <a:ea typeface="標楷體" pitchFamily="65" charset="-120"/>
                 <a:cs typeface="Times New Roman" pitchFamily="18" charset="0"/>
@@ -19075,7 +19163,7 @@
           <p:cNvPr id="6" name="Text Placeholder 3">
             <a:extLst>
               <a:ext uri="{FF2B5EF4-FFF2-40B4-BE49-F238E27FC236}">
-                <a16:creationId xmlns:a16="http://schemas.microsoft.com/office/drawing/2014/main" xmlns="" id="{6263174D-9A64-366A-6A59-F4F84DDA189A}"/>
+                <a16:creationId xmlns:a16="http://schemas.microsoft.com/office/drawing/2014/main" id="{6263174D-9A64-366A-6A59-F4F84DDA189A}"/>
               </a:ext>
             </a:extLst>
           </p:cNvPr>
@@ -19292,13 +19380,13 @@
               <a:buChar char="Ø"/>
             </a:pPr>
             <a:r>
-              <a:rPr lang="zh-TW" altLang="en-US" sz="2000" b="0" kern="0" dirty="0" smtClean="0">
+              <a:rPr lang="zh-TW" altLang="en-US" sz="2000" b="0" kern="0" dirty="0">
                 <a:latin typeface="Calibri" panose="020F0502020204030204" pitchFamily="34" charset="0"/>
                 <a:cs typeface="Segoe UI" panose="020B0502040204020203" pitchFamily="34" charset="0"/>
               </a:rPr>
               <a:t>故障狀況：</a:t>
             </a:r>
-            <a:endParaRPr lang="en-US" altLang="zh-TW" sz="2000" b="0" kern="0" dirty="0" smtClean="0">
+            <a:endParaRPr lang="en-US" altLang="zh-TW" sz="2000" b="0" kern="0" dirty="0">
               <a:latin typeface="Calibri" panose="020F0502020204030204" pitchFamily="34" charset="0"/>
               <a:cs typeface="Segoe UI" panose="020B0502040204020203" pitchFamily="34" charset="0"/>
             </a:endParaRPr>
@@ -19313,7 +19401,7 @@
               <a:buChar char="Ø"/>
             </a:pPr>
             <a:r>
-              <a:rPr lang="zh-TW" altLang="en-US" sz="2000" b="0" kern="0" dirty="0" smtClean="0">
+              <a:rPr lang="zh-TW" altLang="en-US" sz="2000" b="0" kern="0" dirty="0">
                 <a:latin typeface="Calibri" panose="020F0502020204030204" pitchFamily="34" charset="0"/>
                 <a:ea typeface="+mn-ea"/>
                 <a:cs typeface="Segoe UI" panose="020B0502040204020203" pitchFamily="34" charset="0"/>
@@ -19321,7 +19409,7 @@
               <a:t>區北廠新購一顆步進馬達 </a:t>
             </a:r>
             <a:r>
-              <a:rPr lang="en-US" altLang="zh-TW" sz="2000" b="0" kern="0" dirty="0" smtClean="0">
+              <a:rPr lang="en-US" altLang="zh-TW" sz="2000" b="0" kern="0" dirty="0">
                 <a:latin typeface="Calibri" panose="020F0502020204030204" pitchFamily="34" charset="0"/>
                 <a:ea typeface="+mn-ea"/>
                 <a:cs typeface="Segoe UI" panose="020B0502040204020203" pitchFamily="34" charset="0"/>
@@ -19329,15 +19417,15 @@
               <a:t>AZM98AC-TS30</a:t>
             </a:r>
             <a:r>
-              <a:rPr lang="zh-TW" altLang="en-US" sz="2000" b="0" kern="0" dirty="0" smtClean="0">
+              <a:rPr lang="zh-TW" altLang="en-US" sz="2000" b="0" kern="0" dirty="0">
                 <a:latin typeface="Calibri" panose="020F0502020204030204" pitchFamily="34" charset="0"/>
                 <a:ea typeface="+mn-ea"/>
                 <a:cs typeface="Segoe UI" panose="020B0502040204020203" pitchFamily="34" charset="0"/>
               </a:rPr>
-              <a:t>，更換上機後只能</a:t>
+              <a:t>，連接上電後只能</a:t>
             </a:r>
             <a:r>
-              <a:rPr lang="en-US" altLang="zh-TW" sz="2000" b="0" kern="0" dirty="0" smtClean="0">
+              <a:rPr lang="en-US" altLang="zh-TW" sz="2000" b="0" kern="0" dirty="0">
                 <a:latin typeface="Calibri" panose="020F0502020204030204" pitchFamily="34" charset="0"/>
                 <a:ea typeface="+mn-ea"/>
                 <a:cs typeface="Segoe UI" panose="020B0502040204020203" pitchFamily="34" charset="0"/>
@@ -19345,14 +19433,14 @@
               <a:t>JOG</a:t>
             </a:r>
             <a:r>
-              <a:rPr lang="zh-TW" altLang="en-US" sz="2000" b="0" kern="0" dirty="0" smtClean="0">
+              <a:rPr lang="zh-TW" altLang="en-US" sz="2000" b="0" kern="0" dirty="0">
                 <a:latin typeface="Calibri" panose="020F0502020204030204" pitchFamily="34" charset="0"/>
                 <a:ea typeface="+mn-ea"/>
                 <a:cs typeface="Segoe UI" panose="020B0502040204020203" pitchFamily="34" charset="0"/>
               </a:rPr>
               <a:t>動作，無法復歸。</a:t>
             </a:r>
-            <a:endParaRPr lang="en-US" altLang="zh-TW" sz="2000" b="0" kern="0" dirty="0" smtClean="0">
+            <a:endParaRPr lang="en-US" altLang="zh-TW" sz="2000" b="0" kern="0" dirty="0">
               <a:latin typeface="Calibri" panose="020F0502020204030204" pitchFamily="34" charset="0"/>
               <a:ea typeface="+mn-ea"/>
               <a:cs typeface="Segoe UI" panose="020B0502040204020203" pitchFamily="34" charset="0"/>
@@ -19368,14 +19456,14 @@
               <a:buChar char="Ø"/>
             </a:pPr>
             <a:r>
-              <a:rPr lang="zh-TW" altLang="en-US" sz="2000" b="0" kern="0" dirty="0" smtClean="0">
+              <a:rPr lang="zh-TW" altLang="en-US" sz="2000" b="0" kern="0" dirty="0">
                 <a:latin typeface="Calibri" panose="020F0502020204030204" pitchFamily="34" charset="0"/>
                 <a:ea typeface="+mn-ea"/>
                 <a:cs typeface="Segoe UI" panose="020B0502040204020203" pitchFamily="34" charset="0"/>
               </a:rPr>
               <a:t>以前也曾購買過一顆，一樣的故障狀況，但當時沒有處理。</a:t>
             </a:r>
-            <a:endParaRPr lang="en-US" altLang="zh-TW" sz="2000" b="0" kern="0" dirty="0" smtClean="0">
+            <a:endParaRPr lang="en-US" altLang="zh-TW" sz="2000" b="0" kern="0" dirty="0">
               <a:latin typeface="Calibri" panose="020F0502020204030204" pitchFamily="34" charset="0"/>
               <a:ea typeface="+mn-ea"/>
               <a:cs typeface="Segoe UI" panose="020B0502040204020203" pitchFamily="34" charset="0"/>
@@ -19391,19 +19479,19 @@
               <a:buChar char="Ø"/>
             </a:pPr>
             <a:r>
-              <a:rPr lang="zh-TW" altLang="en-US" sz="2000" b="0" kern="0" dirty="0" smtClean="0">
+              <a:rPr lang="zh-TW" altLang="en-US" sz="2000" b="0" kern="0" dirty="0">
                 <a:latin typeface="Calibri" panose="020F0502020204030204" pitchFamily="34" charset="0"/>
                 <a:cs typeface="Segoe UI" panose="020B0502040204020203" pitchFamily="34" charset="0"/>
               </a:rPr>
               <a:t>故障原因：</a:t>
             </a:r>
-            <a:endParaRPr lang="en-US" altLang="zh-TW" sz="2000" b="0" kern="0" dirty="0" smtClean="0">
+            <a:endParaRPr lang="en-US" altLang="zh-TW" sz="2000" b="0" kern="0" dirty="0">
               <a:latin typeface="Calibri" panose="020F0502020204030204" pitchFamily="34" charset="0"/>
               <a:cs typeface="Segoe UI" panose="020B0502040204020203" pitchFamily="34" charset="0"/>
             </a:endParaRPr>
           </a:p>
           <a:p>
-            <a:pPr marL="914400" lvl="1" indent="-457200">
+            <a:pPr marL="720000" lvl="1" indent="-252000">
               <a:lnSpc>
                 <a:spcPct val="150000"/>
               </a:lnSpc>
@@ -19412,7 +19500,7 @@
               <a:buAutoNum type="arabicPeriod"/>
             </a:pPr>
             <a:r>
-              <a:rPr lang="zh-TW" altLang="en-US" sz="2000" b="0" kern="0" dirty="0" smtClean="0">
+              <a:rPr lang="zh-TW" altLang="en-US" sz="2000" b="0" kern="0" dirty="0">
                 <a:latin typeface="Calibri" panose="020F0502020204030204" pitchFamily="34" charset="0"/>
                 <a:ea typeface="+mn-ea"/>
                 <a:cs typeface="Segoe UI" panose="020B0502040204020203" pitchFamily="34" charset="0"/>
@@ -19420,7 +19508,7 @@
               <a:t>東方</a:t>
             </a:r>
             <a:r>
-              <a:rPr lang="en-US" altLang="zh-TW" sz="2000" b="0" kern="0" dirty="0" smtClean="0">
+              <a:rPr lang="en-US" altLang="zh-TW" sz="2000" b="0" kern="0" dirty="0">
                 <a:latin typeface="Calibri" panose="020F0502020204030204" pitchFamily="34" charset="0"/>
                 <a:ea typeface="+mn-ea"/>
                 <a:cs typeface="Segoe UI" panose="020B0502040204020203" pitchFamily="34" charset="0"/>
@@ -19428,23 +19516,15 @@
               <a:t>AZ</a:t>
             </a:r>
             <a:r>
-              <a:rPr lang="zh-TW" altLang="en-US" sz="2000" b="0" kern="0" dirty="0" smtClean="0">
-                <a:latin typeface="Calibri" panose="020F0502020204030204" pitchFamily="34" charset="0"/>
-                <a:ea typeface="+mn-ea"/>
-                <a:cs typeface="Segoe UI" panose="020B0502040204020203" pitchFamily="34" charset="0"/>
-              </a:rPr>
-              <a:t>系列步進</a:t>
-            </a:r>
-            <a:r>
               <a:rPr lang="zh-TW" altLang="en-US" sz="2000" b="0" kern="0" dirty="0">
                 <a:latin typeface="Calibri" panose="020F0502020204030204" pitchFamily="34" charset="0"/>
                 <a:ea typeface="+mn-ea"/>
                 <a:cs typeface="Segoe UI" panose="020B0502040204020203" pitchFamily="34" charset="0"/>
               </a:rPr>
-              <a:t>馬達使用免電池機械式絕對型編碼器，稱做「</a:t>
+              <a:t>系列步進馬達的編碼器稱作「</a:t>
             </a:r>
             <a:r>
-              <a:rPr lang="en-US" altLang="zh-TW" sz="2000" b="0" kern="0" dirty="0" smtClean="0">
+              <a:rPr lang="en-US" altLang="zh-TW" sz="2000" b="0" kern="0" dirty="0">
                 <a:latin typeface="Calibri" panose="020F0502020204030204" pitchFamily="34" charset="0"/>
                 <a:ea typeface="+mn-ea"/>
                 <a:cs typeface="Segoe UI" panose="020B0502040204020203" pitchFamily="34" charset="0"/>
@@ -19457,24 +19537,48 @@
                 <a:ea typeface="+mn-ea"/>
                 <a:cs typeface="Segoe UI" panose="020B0502040204020203" pitchFamily="34" charset="0"/>
               </a:rPr>
-              <a:t>編碼器</a:t>
+              <a:t>編碼器」</a:t>
             </a:r>
             <a:r>
-              <a:rPr lang="zh-TW" altLang="en-US" sz="2000" b="0" kern="0" dirty="0" smtClean="0">
+              <a:rPr lang="en-US" altLang="zh-TW" sz="2000" b="0" kern="0" dirty="0">
                 <a:latin typeface="Calibri" panose="020F0502020204030204" pitchFamily="34" charset="0"/>
                 <a:ea typeface="+mn-ea"/>
                 <a:cs typeface="Segoe UI" panose="020B0502040204020203" pitchFamily="34" charset="0"/>
               </a:rPr>
-              <a:t>」。</a:t>
+              <a:t>(</a:t>
             </a:r>
-            <a:endParaRPr lang="en-US" altLang="zh-TW" sz="2000" b="0" kern="0" dirty="0" smtClean="0">
+            <a:r>
+              <a:rPr lang="zh-TW" altLang="en-US" sz="2000" b="0" kern="0" dirty="0">
+                <a:latin typeface="Calibri" panose="020F0502020204030204" pitchFamily="34" charset="0"/>
+                <a:ea typeface="+mn-ea"/>
+                <a:cs typeface="Segoe UI" panose="020B0502040204020203" pitchFamily="34" charset="0"/>
+              </a:rPr>
+              <a:t>免電池機械式絕對型編碼器</a:t>
+            </a:r>
+            <a:r>
+              <a:rPr lang="en-US" altLang="zh-TW" sz="2000" b="0" kern="0" dirty="0">
+                <a:latin typeface="Calibri" panose="020F0502020204030204" pitchFamily="34" charset="0"/>
+                <a:ea typeface="+mn-ea"/>
+                <a:cs typeface="Segoe UI" panose="020B0502040204020203" pitchFamily="34" charset="0"/>
+              </a:rPr>
+              <a:t>)</a:t>
+            </a:r>
+            <a:r>
+              <a:rPr lang="zh-TW" altLang="en-US" sz="2000" b="0" kern="0" dirty="0">
+                <a:latin typeface="Calibri" panose="020F0502020204030204" pitchFamily="34" charset="0"/>
+                <a:ea typeface="+mn-ea"/>
+                <a:cs typeface="Segoe UI" panose="020B0502040204020203" pitchFamily="34" charset="0"/>
+              </a:rPr>
+              <a:t>。</a:t>
+            </a:r>
+            <a:endParaRPr lang="en-US" altLang="zh-TW" sz="2000" b="0" kern="0" dirty="0">
               <a:latin typeface="Calibri" panose="020F0502020204030204" pitchFamily="34" charset="0"/>
               <a:ea typeface="+mn-ea"/>
               <a:cs typeface="Segoe UI" panose="020B0502040204020203" pitchFamily="34" charset="0"/>
             </a:endParaRPr>
           </a:p>
           <a:p>
-            <a:pPr marL="914400" lvl="1" indent="-457200">
+            <a:pPr marL="720000" lvl="1" indent="-252000">
               <a:lnSpc>
                 <a:spcPct val="150000"/>
               </a:lnSpc>
@@ -19483,7 +19587,7 @@
               <a:buAutoNum type="arabicPeriod"/>
             </a:pPr>
             <a:r>
-              <a:rPr lang="zh-TW" altLang="en-US" sz="2000" b="0" kern="0" dirty="0" smtClean="0">
+              <a:rPr lang="zh-TW" altLang="en-US" sz="2000" b="0" kern="0" dirty="0">
                 <a:latin typeface="Calibri" panose="020F0502020204030204" pitchFamily="34" charset="0"/>
                 <a:ea typeface="+mn-ea"/>
                 <a:cs typeface="Segoe UI" panose="020B0502040204020203" pitchFamily="34" charset="0"/>
@@ -19491,7 +19595,7 @@
               <a:t>此系統馬達新安裝時，必須先設定</a:t>
             </a:r>
             <a:r>
-              <a:rPr lang="en-US" altLang="zh-TW" sz="2000" b="0" kern="0" dirty="0" smtClean="0">
+              <a:rPr lang="en-US" altLang="zh-TW" sz="2000" b="0" kern="0" dirty="0">
                 <a:latin typeface="Calibri" panose="020F0502020204030204" pitchFamily="34" charset="0"/>
                 <a:ea typeface="+mn-ea"/>
                 <a:cs typeface="Segoe UI" panose="020B0502040204020203" pitchFamily="34" charset="0"/>
@@ -19499,7 +19603,7 @@
               <a:t>HOME(</a:t>
             </a:r>
             <a:r>
-              <a:rPr lang="zh-TW" altLang="en-US" sz="2000" b="0" kern="0" dirty="0" smtClean="0">
+              <a:rPr lang="zh-TW" altLang="en-US" sz="2000" b="0" kern="0" dirty="0">
                 <a:latin typeface="Calibri" panose="020F0502020204030204" pitchFamily="34" charset="0"/>
                 <a:ea typeface="+mn-ea"/>
                 <a:cs typeface="Segoe UI" panose="020B0502040204020203" pitchFamily="34" charset="0"/>
@@ -19507,7 +19611,7 @@
               <a:t>零點</a:t>
             </a:r>
             <a:r>
-              <a:rPr lang="en-US" altLang="zh-TW" sz="2000" b="0" kern="0" dirty="0" smtClean="0">
+              <a:rPr lang="en-US" altLang="zh-TW" sz="2000" b="0" kern="0" dirty="0">
                 <a:latin typeface="Calibri" panose="020F0502020204030204" pitchFamily="34" charset="0"/>
                 <a:ea typeface="+mn-ea"/>
                 <a:cs typeface="Segoe UI" panose="020B0502040204020203" pitchFamily="34" charset="0"/>
@@ -19515,28 +19619,12 @@
               <a:t>)</a:t>
             </a:r>
             <a:r>
-              <a:rPr lang="zh-TW" altLang="en-US" sz="2000" b="0" kern="0" dirty="0" smtClean="0">
-                <a:latin typeface="Calibri" panose="020F0502020204030204" pitchFamily="34" charset="0"/>
-                <a:ea typeface="+mn-ea"/>
-                <a:cs typeface="Segoe UI" panose="020B0502040204020203" pitchFamily="34" charset="0"/>
-              </a:rPr>
-              <a:t>，讓編碼器知道</a:t>
-            </a:r>
-            <a:r>
               <a:rPr lang="zh-TW" altLang="en-US" sz="2000" b="0" kern="0" dirty="0">
                 <a:latin typeface="Calibri" panose="020F0502020204030204" pitchFamily="34" charset="0"/>
                 <a:ea typeface="+mn-ea"/>
                 <a:cs typeface="Segoe UI" panose="020B0502040204020203" pitchFamily="34" charset="0"/>
               </a:rPr>
-              <a:t>原點</a:t>
-            </a:r>
-            <a:r>
-              <a:rPr lang="zh-TW" altLang="en-US" sz="2000" b="0" kern="0" dirty="0" smtClean="0">
-                <a:latin typeface="Calibri" panose="020F0502020204030204" pitchFamily="34" charset="0"/>
-                <a:ea typeface="+mn-ea"/>
-                <a:cs typeface="Segoe UI" panose="020B0502040204020203" pitchFamily="34" charset="0"/>
-              </a:rPr>
-              <a:t>位置，才能執行復歸動作。</a:t>
+              <a:t>，讓編碼器知道原點位置，才能執行復歸動作。</a:t>
             </a:r>
             <a:endParaRPr lang="en-US" altLang="zh-TW" sz="2000" b="0" kern="0" dirty="0">
               <a:latin typeface="Calibri" panose="020F0502020204030204" pitchFamily="34" charset="0"/>
@@ -19556,13 +19644,6 @@
   <p:clrMapOvr>
     <a:masterClrMapping/>
   </p:clrMapOvr>
-  <p:timing>
-    <p:tnLst>
-      <p:par>
-        <p:cTn id="1" dur="indefinite" restart="never" nodeType="tmRoot"/>
-      </p:par>
-    </p:tnLst>
-  </p:timing>
 </p:sld>
 </file>
 
